--- a/00-1. human 놀이터/출제 마법사 구조.pptx
+++ b/00-1. human 놀이터/출제 마법사 구조.pptx
@@ -5,7 +5,8 @@
     <p:sldMasterId id="2147483648" r:id="rId1"/>
   </p:sldMasterIdLst>
   <p:sldIdLst>
-    <p:sldId id="256" r:id="rId2"/>
+    <p:sldId id="257" r:id="rId2"/>
+    <p:sldId id="256" r:id="rId3"/>
   </p:sldIdLst>
   <p:sldSz cx="12192000" cy="6858000"/>
   <p:notesSz cx="6858000" cy="9144000"/>
@@ -3326,6 +3327,2014 @@
           <p:cNvPr id="4" name="직사각형 3">
             <a:extLst>
               <a:ext uri="{FF2B5EF4-FFF2-40B4-BE49-F238E27FC236}">
+                <a16:creationId xmlns:a16="http://schemas.microsoft.com/office/drawing/2014/main" id="{FE1F4F6E-3F6B-6CD7-DA94-3812D4392818}"/>
+              </a:ext>
+            </a:extLst>
+          </p:cNvPr>
+          <p:cNvSpPr/>
+          <p:nvPr/>
+        </p:nvSpPr>
+        <p:spPr>
+          <a:xfrm>
+            <a:off x="902676" y="1989500"/>
+            <a:ext cx="1617784" cy="800100"/>
+          </a:xfrm>
+          <a:prstGeom prst="rect">
+            <a:avLst/>
+          </a:prstGeom>
+          <a:solidFill>
+            <a:schemeClr val="accent6">
+              <a:lumMod val="75000"/>
+            </a:schemeClr>
+          </a:solidFill>
+        </p:spPr>
+        <p:style>
+          <a:lnRef idx="2">
+            <a:schemeClr val="accent1">
+              <a:shade val="15000"/>
+            </a:schemeClr>
+          </a:lnRef>
+          <a:fillRef idx="1">
+            <a:schemeClr val="accent1"/>
+          </a:fillRef>
+          <a:effectRef idx="0">
+            <a:schemeClr val="accent1"/>
+          </a:effectRef>
+          <a:fontRef idx="minor">
+            <a:schemeClr val="lt1"/>
+          </a:fontRef>
+        </p:style>
+        <p:txBody>
+          <a:bodyPr rtlCol="0" anchor="ctr"/>
+          <a:lstStyle/>
+          <a:p>
+            <a:pPr algn="ctr"/>
+            <a:r>
+              <a:rPr lang="en-US" altLang="ko-KR" sz="1400" dirty="0"/>
+              <a:t>HWP</a:t>
+            </a:r>
+            <a:endParaRPr lang="ko-KR" altLang="en-US" sz="1400" dirty="0"/>
+          </a:p>
+        </p:txBody>
+      </p:sp>
+      <p:sp>
+        <p:nvSpPr>
+          <p:cNvPr id="5" name="직사각형 4">
+            <a:extLst>
+              <a:ext uri="{FF2B5EF4-FFF2-40B4-BE49-F238E27FC236}">
+                <a16:creationId xmlns:a16="http://schemas.microsoft.com/office/drawing/2014/main" id="{6FE8E559-C5F3-8C82-CE9C-E157FFE21B1F}"/>
+              </a:ext>
+            </a:extLst>
+          </p:cNvPr>
+          <p:cNvSpPr/>
+          <p:nvPr/>
+        </p:nvSpPr>
+        <p:spPr>
+          <a:xfrm>
+            <a:off x="902676" y="3976381"/>
+            <a:ext cx="1617784" cy="800100"/>
+          </a:xfrm>
+          <a:prstGeom prst="rect">
+            <a:avLst/>
+          </a:prstGeom>
+        </p:spPr>
+        <p:style>
+          <a:lnRef idx="2">
+            <a:schemeClr val="accent1">
+              <a:shade val="15000"/>
+            </a:schemeClr>
+          </a:lnRef>
+          <a:fillRef idx="1">
+            <a:schemeClr val="accent1"/>
+          </a:fillRef>
+          <a:effectRef idx="0">
+            <a:schemeClr val="accent1"/>
+          </a:effectRef>
+          <a:fontRef idx="minor">
+            <a:schemeClr val="lt1"/>
+          </a:fontRef>
+        </p:style>
+        <p:txBody>
+          <a:bodyPr rtlCol="0" anchor="ctr"/>
+          <a:lstStyle/>
+          <a:p>
+            <a:pPr algn="ctr"/>
+            <a:r>
+              <a:rPr lang="ko-KR" altLang="en-US" sz="1400" dirty="0"/>
+              <a:t>문항 선택</a:t>
+            </a:r>
+          </a:p>
+        </p:txBody>
+      </p:sp>
+      <p:sp>
+        <p:nvSpPr>
+          <p:cNvPr id="6" name="직사각형 5">
+            <a:extLst>
+              <a:ext uri="{FF2B5EF4-FFF2-40B4-BE49-F238E27FC236}">
+                <a16:creationId xmlns:a16="http://schemas.microsoft.com/office/drawing/2014/main" id="{D375588B-03D0-9C36-0F4B-E554BBF9FE7F}"/>
+              </a:ext>
+            </a:extLst>
+          </p:cNvPr>
+          <p:cNvSpPr/>
+          <p:nvPr/>
+        </p:nvSpPr>
+        <p:spPr>
+          <a:xfrm>
+            <a:off x="3094892" y="3976381"/>
+            <a:ext cx="1617784" cy="800100"/>
+          </a:xfrm>
+          <a:prstGeom prst="rect">
+            <a:avLst/>
+          </a:prstGeom>
+        </p:spPr>
+        <p:style>
+          <a:lnRef idx="2">
+            <a:schemeClr val="accent1">
+              <a:shade val="15000"/>
+            </a:schemeClr>
+          </a:lnRef>
+          <a:fillRef idx="1">
+            <a:schemeClr val="accent1"/>
+          </a:fillRef>
+          <a:effectRef idx="0">
+            <a:schemeClr val="accent1"/>
+          </a:effectRef>
+          <a:fontRef idx="minor">
+            <a:schemeClr val="lt1"/>
+          </a:fontRef>
+        </p:style>
+        <p:txBody>
+          <a:bodyPr rtlCol="0" anchor="ctr"/>
+          <a:lstStyle/>
+          <a:p>
+            <a:pPr algn="ctr"/>
+            <a:r>
+              <a:rPr lang="ko-KR" altLang="en-US" sz="1400" dirty="0"/>
+              <a:t>시험지 제작</a:t>
+            </a:r>
+          </a:p>
+        </p:txBody>
+      </p:sp>
+      <p:sp>
+        <p:nvSpPr>
+          <p:cNvPr id="7" name="직사각형 6">
+            <a:extLst>
+              <a:ext uri="{FF2B5EF4-FFF2-40B4-BE49-F238E27FC236}">
+                <a16:creationId xmlns:a16="http://schemas.microsoft.com/office/drawing/2014/main" id="{A7F428DC-83C3-D75E-62C1-5DB6DE1F53C3}"/>
+              </a:ext>
+            </a:extLst>
+          </p:cNvPr>
+          <p:cNvSpPr/>
+          <p:nvPr/>
+        </p:nvSpPr>
+        <p:spPr>
+          <a:xfrm>
+            <a:off x="5287108" y="3976381"/>
+            <a:ext cx="1617784" cy="800100"/>
+          </a:xfrm>
+          <a:prstGeom prst="rect">
+            <a:avLst/>
+          </a:prstGeom>
+        </p:spPr>
+        <p:style>
+          <a:lnRef idx="2">
+            <a:schemeClr val="accent1">
+              <a:shade val="15000"/>
+            </a:schemeClr>
+          </a:lnRef>
+          <a:fillRef idx="1">
+            <a:schemeClr val="accent1"/>
+          </a:fillRef>
+          <a:effectRef idx="0">
+            <a:schemeClr val="accent1"/>
+          </a:effectRef>
+          <a:fontRef idx="minor">
+            <a:schemeClr val="lt1"/>
+          </a:fontRef>
+        </p:style>
+        <p:txBody>
+          <a:bodyPr rtlCol="0" anchor="ctr"/>
+          <a:lstStyle/>
+          <a:p>
+            <a:pPr algn="ctr"/>
+            <a:r>
+              <a:rPr lang="ko-KR" altLang="en-US" sz="1400" dirty="0"/>
+              <a:t>시험지 배포</a:t>
+            </a:r>
+          </a:p>
+        </p:txBody>
+      </p:sp>
+      <p:sp>
+        <p:nvSpPr>
+          <p:cNvPr id="8" name="직사각형 7">
+            <a:extLst>
+              <a:ext uri="{FF2B5EF4-FFF2-40B4-BE49-F238E27FC236}">
+                <a16:creationId xmlns:a16="http://schemas.microsoft.com/office/drawing/2014/main" id="{1F25C27D-0144-14CB-361E-F15D70C4799A}"/>
+              </a:ext>
+            </a:extLst>
+          </p:cNvPr>
+          <p:cNvSpPr/>
+          <p:nvPr/>
+        </p:nvSpPr>
+        <p:spPr>
+          <a:xfrm>
+            <a:off x="10099431" y="3976381"/>
+            <a:ext cx="1617784" cy="800100"/>
+          </a:xfrm>
+          <a:prstGeom prst="rect">
+            <a:avLst/>
+          </a:prstGeom>
+        </p:spPr>
+        <p:style>
+          <a:lnRef idx="2">
+            <a:schemeClr val="accent1">
+              <a:shade val="15000"/>
+            </a:schemeClr>
+          </a:lnRef>
+          <a:fillRef idx="1">
+            <a:schemeClr val="accent1"/>
+          </a:fillRef>
+          <a:effectRef idx="0">
+            <a:schemeClr val="accent1"/>
+          </a:effectRef>
+          <a:fontRef idx="minor">
+            <a:schemeClr val="lt1"/>
+          </a:fontRef>
+        </p:style>
+        <p:txBody>
+          <a:bodyPr rtlCol="0" anchor="ctr"/>
+          <a:lstStyle/>
+          <a:p>
+            <a:pPr algn="ctr"/>
+            <a:r>
+              <a:rPr lang="ko-KR" altLang="en-US" sz="1400" dirty="0"/>
+              <a:t>결과 확인</a:t>
+            </a:r>
+          </a:p>
+        </p:txBody>
+      </p:sp>
+      <p:sp>
+        <p:nvSpPr>
+          <p:cNvPr id="9" name="직사각형 8">
+            <a:extLst>
+              <a:ext uri="{FF2B5EF4-FFF2-40B4-BE49-F238E27FC236}">
+                <a16:creationId xmlns:a16="http://schemas.microsoft.com/office/drawing/2014/main" id="{924FEA9D-CFEF-72CE-DFEE-37AD6DBF966E}"/>
+              </a:ext>
+            </a:extLst>
+          </p:cNvPr>
+          <p:cNvSpPr/>
+          <p:nvPr/>
+        </p:nvSpPr>
+        <p:spPr>
+          <a:xfrm>
+            <a:off x="5287108" y="5441765"/>
+            <a:ext cx="1617784" cy="800100"/>
+          </a:xfrm>
+          <a:prstGeom prst="rect">
+            <a:avLst/>
+          </a:prstGeom>
+          <a:solidFill>
+            <a:schemeClr val="accent2">
+              <a:lumMod val="75000"/>
+            </a:schemeClr>
+          </a:solidFill>
+        </p:spPr>
+        <p:style>
+          <a:lnRef idx="2">
+            <a:schemeClr val="accent1">
+              <a:shade val="15000"/>
+            </a:schemeClr>
+          </a:lnRef>
+          <a:fillRef idx="1">
+            <a:schemeClr val="accent1"/>
+          </a:fillRef>
+          <a:effectRef idx="0">
+            <a:schemeClr val="accent1"/>
+          </a:effectRef>
+          <a:fontRef idx="minor">
+            <a:schemeClr val="lt1"/>
+          </a:fontRef>
+        </p:style>
+        <p:txBody>
+          <a:bodyPr rtlCol="0" anchor="ctr"/>
+          <a:lstStyle/>
+          <a:p>
+            <a:pPr algn="ctr"/>
+            <a:r>
+              <a:rPr lang="ko-KR" altLang="en-US" sz="1400" dirty="0"/>
+              <a:t>시험지 응시</a:t>
+            </a:r>
+          </a:p>
+        </p:txBody>
+      </p:sp>
+      <p:sp>
+        <p:nvSpPr>
+          <p:cNvPr id="10" name="직사각형 9">
+            <a:extLst>
+              <a:ext uri="{FF2B5EF4-FFF2-40B4-BE49-F238E27FC236}">
+                <a16:creationId xmlns:a16="http://schemas.microsoft.com/office/drawing/2014/main" id="{92633147-35F8-C5CC-6814-9663BAD58C01}"/>
+              </a:ext>
+            </a:extLst>
+          </p:cNvPr>
+          <p:cNvSpPr/>
+          <p:nvPr/>
+        </p:nvSpPr>
+        <p:spPr>
+          <a:xfrm>
+            <a:off x="7857393" y="5441765"/>
+            <a:ext cx="1617784" cy="800100"/>
+          </a:xfrm>
+          <a:prstGeom prst="rect">
+            <a:avLst/>
+          </a:prstGeom>
+          <a:solidFill>
+            <a:schemeClr val="accent2">
+              <a:lumMod val="75000"/>
+            </a:schemeClr>
+          </a:solidFill>
+        </p:spPr>
+        <p:style>
+          <a:lnRef idx="2">
+            <a:schemeClr val="accent1">
+              <a:shade val="15000"/>
+            </a:schemeClr>
+          </a:lnRef>
+          <a:fillRef idx="1">
+            <a:schemeClr val="accent1"/>
+          </a:fillRef>
+          <a:effectRef idx="0">
+            <a:schemeClr val="accent1"/>
+          </a:effectRef>
+          <a:fontRef idx="minor">
+            <a:schemeClr val="lt1"/>
+          </a:fontRef>
+        </p:style>
+        <p:txBody>
+          <a:bodyPr rtlCol="0" anchor="ctr"/>
+          <a:lstStyle/>
+          <a:p>
+            <a:pPr algn="ctr"/>
+            <a:r>
+              <a:rPr lang="ko-KR" altLang="en-US" sz="1400" dirty="0"/>
+              <a:t>시험지 제출</a:t>
+            </a:r>
+          </a:p>
+        </p:txBody>
+      </p:sp>
+      <p:sp>
+        <p:nvSpPr>
+          <p:cNvPr id="11" name="직사각형 10">
+            <a:extLst>
+              <a:ext uri="{FF2B5EF4-FFF2-40B4-BE49-F238E27FC236}">
+                <a16:creationId xmlns:a16="http://schemas.microsoft.com/office/drawing/2014/main" id="{963560E3-F1B6-D61A-CB04-07C5D70352C6}"/>
+              </a:ext>
+            </a:extLst>
+          </p:cNvPr>
+          <p:cNvSpPr/>
+          <p:nvPr/>
+        </p:nvSpPr>
+        <p:spPr>
+          <a:xfrm>
+            <a:off x="10099431" y="5453489"/>
+            <a:ext cx="1617784" cy="800100"/>
+          </a:xfrm>
+          <a:prstGeom prst="rect">
+            <a:avLst/>
+          </a:prstGeom>
+          <a:solidFill>
+            <a:schemeClr val="accent2">
+              <a:lumMod val="75000"/>
+            </a:schemeClr>
+          </a:solidFill>
+        </p:spPr>
+        <p:style>
+          <a:lnRef idx="2">
+            <a:schemeClr val="accent1">
+              <a:shade val="15000"/>
+            </a:schemeClr>
+          </a:lnRef>
+          <a:fillRef idx="1">
+            <a:schemeClr val="accent1"/>
+          </a:fillRef>
+          <a:effectRef idx="0">
+            <a:schemeClr val="accent1"/>
+          </a:effectRef>
+          <a:fontRef idx="minor">
+            <a:schemeClr val="lt1"/>
+          </a:fontRef>
+        </p:style>
+        <p:txBody>
+          <a:bodyPr rtlCol="0" anchor="ctr"/>
+          <a:lstStyle/>
+          <a:p>
+            <a:pPr algn="ctr"/>
+            <a:r>
+              <a:rPr lang="ko-KR" altLang="en-US" sz="1400" dirty="0"/>
+              <a:t>결과 확인</a:t>
+            </a:r>
+          </a:p>
+        </p:txBody>
+      </p:sp>
+      <p:sp>
+        <p:nvSpPr>
+          <p:cNvPr id="14" name="화살표: 오른쪽 13">
+            <a:extLst>
+              <a:ext uri="{FF2B5EF4-FFF2-40B4-BE49-F238E27FC236}">
+                <a16:creationId xmlns:a16="http://schemas.microsoft.com/office/drawing/2014/main" id="{B088C78B-10C4-0C0F-6B1D-59D035B82E85}"/>
+              </a:ext>
+            </a:extLst>
+          </p:cNvPr>
+          <p:cNvSpPr/>
+          <p:nvPr/>
+        </p:nvSpPr>
+        <p:spPr>
+          <a:xfrm>
+            <a:off x="2643553" y="4219634"/>
+            <a:ext cx="269630" cy="360485"/>
+          </a:xfrm>
+          <a:prstGeom prst="rightArrow">
+            <a:avLst/>
+          </a:prstGeom>
+        </p:spPr>
+        <p:style>
+          <a:lnRef idx="2">
+            <a:schemeClr val="accent1">
+              <a:shade val="15000"/>
+            </a:schemeClr>
+          </a:lnRef>
+          <a:fillRef idx="1">
+            <a:schemeClr val="accent1"/>
+          </a:fillRef>
+          <a:effectRef idx="0">
+            <a:schemeClr val="accent1"/>
+          </a:effectRef>
+          <a:fontRef idx="minor">
+            <a:schemeClr val="lt1"/>
+          </a:fontRef>
+        </p:style>
+        <p:txBody>
+          <a:bodyPr rtlCol="0" anchor="ctr"/>
+          <a:lstStyle/>
+          <a:p>
+            <a:pPr algn="ctr"/>
+            <a:endParaRPr lang="ko-KR" altLang="en-US" sz="1400"/>
+          </a:p>
+        </p:txBody>
+      </p:sp>
+      <p:sp>
+        <p:nvSpPr>
+          <p:cNvPr id="15" name="화살표: 오른쪽 14">
+            <a:extLst>
+              <a:ext uri="{FF2B5EF4-FFF2-40B4-BE49-F238E27FC236}">
+                <a16:creationId xmlns:a16="http://schemas.microsoft.com/office/drawing/2014/main" id="{3CF4B6A8-84D7-47E9-99A5-1BF9B4E625B1}"/>
+              </a:ext>
+            </a:extLst>
+          </p:cNvPr>
+          <p:cNvSpPr/>
+          <p:nvPr/>
+        </p:nvSpPr>
+        <p:spPr>
+          <a:xfrm>
+            <a:off x="4865077" y="4219633"/>
+            <a:ext cx="269630" cy="360485"/>
+          </a:xfrm>
+          <a:prstGeom prst="rightArrow">
+            <a:avLst/>
+          </a:prstGeom>
+        </p:spPr>
+        <p:style>
+          <a:lnRef idx="2">
+            <a:schemeClr val="accent1">
+              <a:shade val="15000"/>
+            </a:schemeClr>
+          </a:lnRef>
+          <a:fillRef idx="1">
+            <a:schemeClr val="accent1"/>
+          </a:fillRef>
+          <a:effectRef idx="0">
+            <a:schemeClr val="accent1"/>
+          </a:effectRef>
+          <a:fontRef idx="minor">
+            <a:schemeClr val="lt1"/>
+          </a:fontRef>
+        </p:style>
+        <p:txBody>
+          <a:bodyPr rtlCol="0" anchor="ctr"/>
+          <a:lstStyle/>
+          <a:p>
+            <a:pPr algn="ctr"/>
+            <a:endParaRPr lang="ko-KR" altLang="en-US" sz="1400"/>
+          </a:p>
+        </p:txBody>
+      </p:sp>
+      <p:sp>
+        <p:nvSpPr>
+          <p:cNvPr id="16" name="화살표: 오른쪽 15">
+            <a:extLst>
+              <a:ext uri="{FF2B5EF4-FFF2-40B4-BE49-F238E27FC236}">
+                <a16:creationId xmlns:a16="http://schemas.microsoft.com/office/drawing/2014/main" id="{3021E612-D1AD-450D-1796-0AC89AE2FA9D}"/>
+              </a:ext>
+            </a:extLst>
+          </p:cNvPr>
+          <p:cNvSpPr/>
+          <p:nvPr/>
+        </p:nvSpPr>
+        <p:spPr>
+          <a:xfrm>
+            <a:off x="7217019" y="5673296"/>
+            <a:ext cx="269630" cy="360485"/>
+          </a:xfrm>
+          <a:prstGeom prst="rightArrow">
+            <a:avLst/>
+          </a:prstGeom>
+          <a:solidFill>
+            <a:schemeClr val="accent2">
+              <a:lumMod val="75000"/>
+            </a:schemeClr>
+          </a:solidFill>
+        </p:spPr>
+        <p:style>
+          <a:lnRef idx="2">
+            <a:schemeClr val="accent1">
+              <a:shade val="15000"/>
+            </a:schemeClr>
+          </a:lnRef>
+          <a:fillRef idx="1">
+            <a:schemeClr val="accent1"/>
+          </a:fillRef>
+          <a:effectRef idx="0">
+            <a:schemeClr val="accent1"/>
+          </a:effectRef>
+          <a:fontRef idx="minor">
+            <a:schemeClr val="lt1"/>
+          </a:fontRef>
+        </p:style>
+        <p:txBody>
+          <a:bodyPr rtlCol="0" anchor="ctr"/>
+          <a:lstStyle/>
+          <a:p>
+            <a:pPr algn="ctr"/>
+            <a:endParaRPr lang="ko-KR" altLang="en-US"/>
+          </a:p>
+        </p:txBody>
+      </p:sp>
+      <p:sp>
+        <p:nvSpPr>
+          <p:cNvPr id="17" name="화살표: 오른쪽 16">
+            <a:extLst>
+              <a:ext uri="{FF2B5EF4-FFF2-40B4-BE49-F238E27FC236}">
+                <a16:creationId xmlns:a16="http://schemas.microsoft.com/office/drawing/2014/main" id="{03395E02-D440-8944-DCF9-5152374C9359}"/>
+              </a:ext>
+            </a:extLst>
+          </p:cNvPr>
+          <p:cNvSpPr/>
+          <p:nvPr/>
+        </p:nvSpPr>
+        <p:spPr>
+          <a:xfrm>
+            <a:off x="9661281" y="5655711"/>
+            <a:ext cx="269630" cy="360485"/>
+          </a:xfrm>
+          <a:prstGeom prst="rightArrow">
+            <a:avLst/>
+          </a:prstGeom>
+          <a:solidFill>
+            <a:schemeClr val="accent2">
+              <a:lumMod val="75000"/>
+            </a:schemeClr>
+          </a:solidFill>
+        </p:spPr>
+        <p:style>
+          <a:lnRef idx="2">
+            <a:schemeClr val="accent1">
+              <a:shade val="15000"/>
+            </a:schemeClr>
+          </a:lnRef>
+          <a:fillRef idx="1">
+            <a:schemeClr val="accent1"/>
+          </a:fillRef>
+          <a:effectRef idx="0">
+            <a:schemeClr val="accent1"/>
+          </a:effectRef>
+          <a:fontRef idx="minor">
+            <a:schemeClr val="lt1"/>
+          </a:fontRef>
+        </p:style>
+        <p:txBody>
+          <a:bodyPr rtlCol="0" anchor="ctr"/>
+          <a:lstStyle/>
+          <a:p>
+            <a:pPr algn="ctr"/>
+            <a:endParaRPr lang="ko-KR" altLang="en-US"/>
+          </a:p>
+        </p:txBody>
+      </p:sp>
+      <p:sp>
+        <p:nvSpPr>
+          <p:cNvPr id="18" name="화살표: 오른쪽 17">
+            <a:extLst>
+              <a:ext uri="{FF2B5EF4-FFF2-40B4-BE49-F238E27FC236}">
+                <a16:creationId xmlns:a16="http://schemas.microsoft.com/office/drawing/2014/main" id="{9D239DA0-66B5-66F3-1A42-59E5E45CF612}"/>
+              </a:ext>
+            </a:extLst>
+          </p:cNvPr>
+          <p:cNvSpPr/>
+          <p:nvPr/>
+        </p:nvSpPr>
+        <p:spPr>
+          <a:xfrm>
+            <a:off x="7057293" y="4219633"/>
+            <a:ext cx="2854568" cy="360485"/>
+          </a:xfrm>
+          <a:prstGeom prst="rightArrow">
+            <a:avLst/>
+          </a:prstGeom>
+          <a:solidFill>
+            <a:schemeClr val="bg1">
+              <a:lumMod val="85000"/>
+            </a:schemeClr>
+          </a:solidFill>
+        </p:spPr>
+        <p:style>
+          <a:lnRef idx="2">
+            <a:schemeClr val="accent1">
+              <a:shade val="15000"/>
+            </a:schemeClr>
+          </a:lnRef>
+          <a:fillRef idx="1">
+            <a:schemeClr val="accent1"/>
+          </a:fillRef>
+          <a:effectRef idx="0">
+            <a:schemeClr val="accent1"/>
+          </a:effectRef>
+          <a:fontRef idx="minor">
+            <a:schemeClr val="lt1"/>
+          </a:fontRef>
+        </p:style>
+        <p:txBody>
+          <a:bodyPr rtlCol="0" anchor="ctr"/>
+          <a:lstStyle/>
+          <a:p>
+            <a:pPr algn="ctr"/>
+            <a:endParaRPr lang="ko-KR" altLang="en-US" sz="1400"/>
+          </a:p>
+        </p:txBody>
+      </p:sp>
+      <p:sp>
+        <p:nvSpPr>
+          <p:cNvPr id="19" name="직사각형 18">
+            <a:extLst>
+              <a:ext uri="{FF2B5EF4-FFF2-40B4-BE49-F238E27FC236}">
+                <a16:creationId xmlns:a16="http://schemas.microsoft.com/office/drawing/2014/main" id="{3C849480-BB67-3AD9-1D82-A82FF1950AB6}"/>
+              </a:ext>
+            </a:extLst>
+          </p:cNvPr>
+          <p:cNvSpPr/>
+          <p:nvPr/>
+        </p:nvSpPr>
+        <p:spPr>
+          <a:xfrm>
+            <a:off x="3094892" y="1989500"/>
+            <a:ext cx="1617784" cy="800100"/>
+          </a:xfrm>
+          <a:prstGeom prst="rect">
+            <a:avLst/>
+          </a:prstGeom>
+          <a:solidFill>
+            <a:schemeClr val="accent6">
+              <a:lumMod val="75000"/>
+            </a:schemeClr>
+          </a:solidFill>
+        </p:spPr>
+        <p:style>
+          <a:lnRef idx="2">
+            <a:schemeClr val="accent1">
+              <a:shade val="15000"/>
+            </a:schemeClr>
+          </a:lnRef>
+          <a:fillRef idx="1">
+            <a:schemeClr val="accent1"/>
+          </a:fillRef>
+          <a:effectRef idx="0">
+            <a:schemeClr val="accent1"/>
+          </a:effectRef>
+          <a:fontRef idx="minor">
+            <a:schemeClr val="lt1"/>
+          </a:fontRef>
+        </p:style>
+        <p:txBody>
+          <a:bodyPr wrap="none" rtlCol="0" anchor="ctr"/>
+          <a:lstStyle/>
+          <a:p>
+            <a:pPr algn="ctr"/>
+            <a:r>
+              <a:rPr lang="ko-KR" altLang="en-US" sz="1400" dirty="0"/>
+              <a:t>파싱</a:t>
+            </a:r>
+            <a:r>
+              <a:rPr lang="en-US" altLang="ko-KR" sz="1400" dirty="0"/>
+              <a:t>/DB</a:t>
+            </a:r>
+            <a:r>
+              <a:rPr lang="ko-KR" altLang="en-US" sz="1400" dirty="0"/>
+              <a:t>화</a:t>
+            </a:r>
+            <a:endParaRPr lang="en-US" altLang="ko-KR" sz="1400" dirty="0"/>
+          </a:p>
+          <a:p>
+            <a:pPr algn="ctr"/>
+            <a:r>
+              <a:rPr lang="en-US" altLang="ko-KR" sz="1400" dirty="0"/>
+              <a:t>(law</a:t>
+            </a:r>
+            <a:r>
+              <a:rPr lang="ko-KR" altLang="en-US" sz="1400" dirty="0"/>
+              <a:t> </a:t>
+            </a:r>
+            <a:r>
+              <a:rPr lang="en-US" altLang="ko-KR" sz="1400" dirty="0"/>
+              <a:t>DB)</a:t>
+            </a:r>
+            <a:endParaRPr lang="ko-KR" altLang="en-US" sz="1400" dirty="0"/>
+          </a:p>
+        </p:txBody>
+      </p:sp>
+      <p:grpSp>
+        <p:nvGrpSpPr>
+          <p:cNvPr id="21" name="그룹 20">
+            <a:extLst>
+              <a:ext uri="{FF2B5EF4-FFF2-40B4-BE49-F238E27FC236}">
+                <a16:creationId xmlns:a16="http://schemas.microsoft.com/office/drawing/2014/main" id="{06BF3417-29A1-D4F7-95BA-6E843BBBA451}"/>
+              </a:ext>
+            </a:extLst>
+          </p:cNvPr>
+          <p:cNvGrpSpPr/>
+          <p:nvPr/>
+        </p:nvGrpSpPr>
+        <p:grpSpPr>
+          <a:xfrm>
+            <a:off x="338253" y="4219633"/>
+            <a:ext cx="309372" cy="463550"/>
+            <a:chOff x="10775950" y="755650"/>
+            <a:chExt cx="309372" cy="463550"/>
+          </a:xfrm>
+          <a:solidFill>
+            <a:schemeClr val="tx2">
+              <a:lumMod val="75000"/>
+              <a:lumOff val="25000"/>
+            </a:schemeClr>
+          </a:solidFill>
+        </p:grpSpPr>
+        <p:sp>
+          <p:nvSpPr>
+            <p:cNvPr id="22" name="이등변 삼각형 21">
+              <a:extLst>
+                <a:ext uri="{FF2B5EF4-FFF2-40B4-BE49-F238E27FC236}">
+                  <a16:creationId xmlns:a16="http://schemas.microsoft.com/office/drawing/2014/main" id="{96CE084E-7058-22AA-D4D9-B0EB48C919CE}"/>
+                </a:ext>
+              </a:extLst>
+            </p:cNvPr>
+            <p:cNvSpPr/>
+            <p:nvPr/>
+          </p:nvSpPr>
+          <p:spPr>
+            <a:xfrm>
+              <a:off x="10775950" y="952500"/>
+              <a:ext cx="309372" cy="266700"/>
+            </a:xfrm>
+            <a:prstGeom prst="triangle">
+              <a:avLst/>
+            </a:prstGeom>
+            <a:grpFill/>
+            <a:ln>
+              <a:noFill/>
+            </a:ln>
+          </p:spPr>
+          <p:style>
+            <a:lnRef idx="2">
+              <a:schemeClr val="accent1">
+                <a:shade val="15000"/>
+              </a:schemeClr>
+            </a:lnRef>
+            <a:fillRef idx="1">
+              <a:schemeClr val="accent1"/>
+            </a:fillRef>
+            <a:effectRef idx="0">
+              <a:schemeClr val="accent1"/>
+            </a:effectRef>
+            <a:fontRef idx="minor">
+              <a:schemeClr val="lt1"/>
+            </a:fontRef>
+          </p:style>
+          <p:txBody>
+            <a:bodyPr rtlCol="0" anchor="ctr"/>
+            <a:lstStyle/>
+            <a:p>
+              <a:pPr algn="ctr"/>
+              <a:endParaRPr lang="ko-KR" altLang="en-US"/>
+            </a:p>
+          </p:txBody>
+        </p:sp>
+        <p:sp>
+          <p:nvSpPr>
+            <p:cNvPr id="23" name="타원 22">
+              <a:extLst>
+                <a:ext uri="{FF2B5EF4-FFF2-40B4-BE49-F238E27FC236}">
+                  <a16:creationId xmlns:a16="http://schemas.microsoft.com/office/drawing/2014/main" id="{EBCEF37A-F344-54B1-1A36-87583D998B8E}"/>
+                </a:ext>
+              </a:extLst>
+            </p:cNvPr>
+            <p:cNvSpPr/>
+            <p:nvPr/>
+          </p:nvSpPr>
+          <p:spPr>
+            <a:xfrm>
+              <a:off x="10801350" y="755650"/>
+              <a:ext cx="266700" cy="266700"/>
+            </a:xfrm>
+            <a:prstGeom prst="ellipse">
+              <a:avLst/>
+            </a:prstGeom>
+            <a:grpFill/>
+            <a:ln>
+              <a:noFill/>
+            </a:ln>
+          </p:spPr>
+          <p:style>
+            <a:lnRef idx="2">
+              <a:schemeClr val="accent1">
+                <a:shade val="15000"/>
+              </a:schemeClr>
+            </a:lnRef>
+            <a:fillRef idx="1">
+              <a:schemeClr val="accent1"/>
+            </a:fillRef>
+            <a:effectRef idx="0">
+              <a:schemeClr val="accent1"/>
+            </a:effectRef>
+            <a:fontRef idx="minor">
+              <a:schemeClr val="lt1"/>
+            </a:fontRef>
+          </p:style>
+          <p:txBody>
+            <a:bodyPr rtlCol="0" anchor="ctr"/>
+            <a:lstStyle/>
+            <a:p>
+              <a:pPr algn="ctr"/>
+              <a:endParaRPr lang="ko-KR" altLang="en-US"/>
+            </a:p>
+          </p:txBody>
+        </p:sp>
+      </p:grpSp>
+      <p:sp>
+        <p:nvSpPr>
+          <p:cNvPr id="24" name="TextBox 23">
+            <a:extLst>
+              <a:ext uri="{FF2B5EF4-FFF2-40B4-BE49-F238E27FC236}">
+                <a16:creationId xmlns:a16="http://schemas.microsoft.com/office/drawing/2014/main" id="{FE579CAB-CE28-649D-CEAA-D179A698FFBC}"/>
+              </a:ext>
+            </a:extLst>
+          </p:cNvPr>
+          <p:cNvSpPr txBox="1"/>
+          <p:nvPr/>
+        </p:nvSpPr>
+        <p:spPr>
+          <a:xfrm>
+            <a:off x="328244" y="3972438"/>
+            <a:ext cx="441146" cy="246221"/>
+          </a:xfrm>
+          <a:prstGeom prst="rect">
+            <a:avLst/>
+          </a:prstGeom>
+          <a:noFill/>
+        </p:spPr>
+        <p:txBody>
+          <a:bodyPr wrap="none" rtlCol="0">
+            <a:spAutoFit/>
+          </a:bodyPr>
+          <a:lstStyle/>
+          <a:p>
+            <a:r>
+              <a:rPr lang="ko-KR" altLang="en-US" sz="1000" b="1" dirty="0"/>
+              <a:t>교사</a:t>
+            </a:r>
+          </a:p>
+        </p:txBody>
+      </p:sp>
+      <p:grpSp>
+        <p:nvGrpSpPr>
+          <p:cNvPr id="25" name="그룹 24">
+            <a:extLst>
+              <a:ext uri="{FF2B5EF4-FFF2-40B4-BE49-F238E27FC236}">
+                <a16:creationId xmlns:a16="http://schemas.microsoft.com/office/drawing/2014/main" id="{326EC2E2-BB27-D076-EA24-A34C4F32DABF}"/>
+              </a:ext>
+            </a:extLst>
+          </p:cNvPr>
+          <p:cNvGrpSpPr/>
+          <p:nvPr/>
+        </p:nvGrpSpPr>
+        <p:grpSpPr>
+          <a:xfrm>
+            <a:off x="4482573" y="5881133"/>
+            <a:ext cx="180281" cy="270125"/>
+            <a:chOff x="10775950" y="755650"/>
+            <a:chExt cx="309372" cy="463550"/>
+          </a:xfrm>
+          <a:solidFill>
+            <a:schemeClr val="accent2">
+              <a:lumMod val="75000"/>
+            </a:schemeClr>
+          </a:solidFill>
+        </p:grpSpPr>
+        <p:sp>
+          <p:nvSpPr>
+            <p:cNvPr id="26" name="이등변 삼각형 25">
+              <a:extLst>
+                <a:ext uri="{FF2B5EF4-FFF2-40B4-BE49-F238E27FC236}">
+                  <a16:creationId xmlns:a16="http://schemas.microsoft.com/office/drawing/2014/main" id="{60F905F3-1A85-7A7E-D544-099647067B83}"/>
+                </a:ext>
+              </a:extLst>
+            </p:cNvPr>
+            <p:cNvSpPr/>
+            <p:nvPr/>
+          </p:nvSpPr>
+          <p:spPr>
+            <a:xfrm>
+              <a:off x="10775950" y="952500"/>
+              <a:ext cx="309372" cy="266700"/>
+            </a:xfrm>
+            <a:prstGeom prst="triangle">
+              <a:avLst/>
+            </a:prstGeom>
+            <a:grpFill/>
+            <a:ln>
+              <a:noFill/>
+            </a:ln>
+          </p:spPr>
+          <p:style>
+            <a:lnRef idx="2">
+              <a:schemeClr val="accent1">
+                <a:shade val="15000"/>
+              </a:schemeClr>
+            </a:lnRef>
+            <a:fillRef idx="1">
+              <a:schemeClr val="accent1"/>
+            </a:fillRef>
+            <a:effectRef idx="0">
+              <a:schemeClr val="accent1"/>
+            </a:effectRef>
+            <a:fontRef idx="minor">
+              <a:schemeClr val="lt1"/>
+            </a:fontRef>
+          </p:style>
+          <p:txBody>
+            <a:bodyPr rtlCol="0" anchor="ctr"/>
+            <a:lstStyle/>
+            <a:p>
+              <a:pPr algn="ctr"/>
+              <a:endParaRPr lang="ko-KR" altLang="en-US"/>
+            </a:p>
+          </p:txBody>
+        </p:sp>
+        <p:sp>
+          <p:nvSpPr>
+            <p:cNvPr id="27" name="타원 26">
+              <a:extLst>
+                <a:ext uri="{FF2B5EF4-FFF2-40B4-BE49-F238E27FC236}">
+                  <a16:creationId xmlns:a16="http://schemas.microsoft.com/office/drawing/2014/main" id="{910B31BF-1C25-4D9B-4D25-2F430687C5DC}"/>
+                </a:ext>
+              </a:extLst>
+            </p:cNvPr>
+            <p:cNvSpPr/>
+            <p:nvPr/>
+          </p:nvSpPr>
+          <p:spPr>
+            <a:xfrm>
+              <a:off x="10801350" y="755650"/>
+              <a:ext cx="266700" cy="266700"/>
+            </a:xfrm>
+            <a:prstGeom prst="ellipse">
+              <a:avLst/>
+            </a:prstGeom>
+            <a:grpFill/>
+            <a:ln>
+              <a:noFill/>
+            </a:ln>
+          </p:spPr>
+          <p:style>
+            <a:lnRef idx="2">
+              <a:schemeClr val="accent1">
+                <a:shade val="15000"/>
+              </a:schemeClr>
+            </a:lnRef>
+            <a:fillRef idx="1">
+              <a:schemeClr val="accent1"/>
+            </a:fillRef>
+            <a:effectRef idx="0">
+              <a:schemeClr val="accent1"/>
+            </a:effectRef>
+            <a:fontRef idx="minor">
+              <a:schemeClr val="lt1"/>
+            </a:fontRef>
+          </p:style>
+          <p:txBody>
+            <a:bodyPr rtlCol="0" anchor="ctr"/>
+            <a:lstStyle/>
+            <a:p>
+              <a:pPr algn="ctr"/>
+              <a:endParaRPr lang="ko-KR" altLang="en-US"/>
+            </a:p>
+          </p:txBody>
+        </p:sp>
+      </p:grpSp>
+      <p:grpSp>
+        <p:nvGrpSpPr>
+          <p:cNvPr id="28" name="그룹 27">
+            <a:extLst>
+              <a:ext uri="{FF2B5EF4-FFF2-40B4-BE49-F238E27FC236}">
+                <a16:creationId xmlns:a16="http://schemas.microsoft.com/office/drawing/2014/main" id="{13865874-1E6D-E755-5D19-E8B00544374E}"/>
+              </a:ext>
+            </a:extLst>
+          </p:cNvPr>
+          <p:cNvGrpSpPr/>
+          <p:nvPr/>
+        </p:nvGrpSpPr>
+        <p:grpSpPr>
+          <a:xfrm>
+            <a:off x="4677655" y="5881133"/>
+            <a:ext cx="180281" cy="270125"/>
+            <a:chOff x="10775950" y="755650"/>
+            <a:chExt cx="309372" cy="463550"/>
+          </a:xfrm>
+          <a:solidFill>
+            <a:schemeClr val="accent2">
+              <a:lumMod val="75000"/>
+            </a:schemeClr>
+          </a:solidFill>
+        </p:grpSpPr>
+        <p:sp>
+          <p:nvSpPr>
+            <p:cNvPr id="29" name="이등변 삼각형 28">
+              <a:extLst>
+                <a:ext uri="{FF2B5EF4-FFF2-40B4-BE49-F238E27FC236}">
+                  <a16:creationId xmlns:a16="http://schemas.microsoft.com/office/drawing/2014/main" id="{9A9948B7-7FA2-20E1-9F8B-505602BF0814}"/>
+                </a:ext>
+              </a:extLst>
+            </p:cNvPr>
+            <p:cNvSpPr/>
+            <p:nvPr/>
+          </p:nvSpPr>
+          <p:spPr>
+            <a:xfrm>
+              <a:off x="10775950" y="952500"/>
+              <a:ext cx="309372" cy="266700"/>
+            </a:xfrm>
+            <a:prstGeom prst="triangle">
+              <a:avLst/>
+            </a:prstGeom>
+            <a:grpFill/>
+            <a:ln>
+              <a:noFill/>
+            </a:ln>
+          </p:spPr>
+          <p:style>
+            <a:lnRef idx="2">
+              <a:schemeClr val="accent1">
+                <a:shade val="15000"/>
+              </a:schemeClr>
+            </a:lnRef>
+            <a:fillRef idx="1">
+              <a:schemeClr val="accent1"/>
+            </a:fillRef>
+            <a:effectRef idx="0">
+              <a:schemeClr val="accent1"/>
+            </a:effectRef>
+            <a:fontRef idx="minor">
+              <a:schemeClr val="lt1"/>
+            </a:fontRef>
+          </p:style>
+          <p:txBody>
+            <a:bodyPr rtlCol="0" anchor="ctr"/>
+            <a:lstStyle/>
+            <a:p>
+              <a:pPr algn="ctr"/>
+              <a:endParaRPr lang="ko-KR" altLang="en-US"/>
+            </a:p>
+          </p:txBody>
+        </p:sp>
+        <p:sp>
+          <p:nvSpPr>
+            <p:cNvPr id="30" name="타원 29">
+              <a:extLst>
+                <a:ext uri="{FF2B5EF4-FFF2-40B4-BE49-F238E27FC236}">
+                  <a16:creationId xmlns:a16="http://schemas.microsoft.com/office/drawing/2014/main" id="{028FD420-73D3-21D9-6601-C83FC24D73BF}"/>
+                </a:ext>
+              </a:extLst>
+            </p:cNvPr>
+            <p:cNvSpPr/>
+            <p:nvPr/>
+          </p:nvSpPr>
+          <p:spPr>
+            <a:xfrm>
+              <a:off x="10801350" y="755650"/>
+              <a:ext cx="266700" cy="266700"/>
+            </a:xfrm>
+            <a:prstGeom prst="ellipse">
+              <a:avLst/>
+            </a:prstGeom>
+            <a:grpFill/>
+            <a:ln>
+              <a:noFill/>
+            </a:ln>
+          </p:spPr>
+          <p:style>
+            <a:lnRef idx="2">
+              <a:schemeClr val="accent1">
+                <a:shade val="15000"/>
+              </a:schemeClr>
+            </a:lnRef>
+            <a:fillRef idx="1">
+              <a:schemeClr val="accent1"/>
+            </a:fillRef>
+            <a:effectRef idx="0">
+              <a:schemeClr val="accent1"/>
+            </a:effectRef>
+            <a:fontRef idx="minor">
+              <a:schemeClr val="lt1"/>
+            </a:fontRef>
+          </p:style>
+          <p:txBody>
+            <a:bodyPr rtlCol="0" anchor="ctr"/>
+            <a:lstStyle/>
+            <a:p>
+              <a:pPr algn="ctr"/>
+              <a:endParaRPr lang="ko-KR" altLang="en-US"/>
+            </a:p>
+          </p:txBody>
+        </p:sp>
+      </p:grpSp>
+      <p:grpSp>
+        <p:nvGrpSpPr>
+          <p:cNvPr id="31" name="그룹 30">
+            <a:extLst>
+              <a:ext uri="{FF2B5EF4-FFF2-40B4-BE49-F238E27FC236}">
+                <a16:creationId xmlns:a16="http://schemas.microsoft.com/office/drawing/2014/main" id="{7925773A-7F19-64ED-0D62-DEAB58FFAFBD}"/>
+              </a:ext>
+            </a:extLst>
+          </p:cNvPr>
+          <p:cNvGrpSpPr/>
+          <p:nvPr/>
+        </p:nvGrpSpPr>
+        <p:grpSpPr>
+          <a:xfrm>
+            <a:off x="4882623" y="5887570"/>
+            <a:ext cx="180281" cy="270125"/>
+            <a:chOff x="10775950" y="755650"/>
+            <a:chExt cx="309372" cy="463550"/>
+          </a:xfrm>
+          <a:solidFill>
+            <a:schemeClr val="accent2">
+              <a:lumMod val="75000"/>
+            </a:schemeClr>
+          </a:solidFill>
+        </p:grpSpPr>
+        <p:sp>
+          <p:nvSpPr>
+            <p:cNvPr id="32" name="이등변 삼각형 31">
+              <a:extLst>
+                <a:ext uri="{FF2B5EF4-FFF2-40B4-BE49-F238E27FC236}">
+                  <a16:creationId xmlns:a16="http://schemas.microsoft.com/office/drawing/2014/main" id="{F4AE0393-DC6C-618B-5A51-C3A1A9E74884}"/>
+                </a:ext>
+              </a:extLst>
+            </p:cNvPr>
+            <p:cNvSpPr/>
+            <p:nvPr/>
+          </p:nvSpPr>
+          <p:spPr>
+            <a:xfrm>
+              <a:off x="10775950" y="952500"/>
+              <a:ext cx="309372" cy="266700"/>
+            </a:xfrm>
+            <a:prstGeom prst="triangle">
+              <a:avLst/>
+            </a:prstGeom>
+            <a:grpFill/>
+            <a:ln>
+              <a:noFill/>
+            </a:ln>
+          </p:spPr>
+          <p:style>
+            <a:lnRef idx="2">
+              <a:schemeClr val="accent1">
+                <a:shade val="15000"/>
+              </a:schemeClr>
+            </a:lnRef>
+            <a:fillRef idx="1">
+              <a:schemeClr val="accent1"/>
+            </a:fillRef>
+            <a:effectRef idx="0">
+              <a:schemeClr val="accent1"/>
+            </a:effectRef>
+            <a:fontRef idx="minor">
+              <a:schemeClr val="lt1"/>
+            </a:fontRef>
+          </p:style>
+          <p:txBody>
+            <a:bodyPr rtlCol="0" anchor="ctr"/>
+            <a:lstStyle/>
+            <a:p>
+              <a:pPr algn="ctr"/>
+              <a:endParaRPr lang="ko-KR" altLang="en-US"/>
+            </a:p>
+          </p:txBody>
+        </p:sp>
+        <p:sp>
+          <p:nvSpPr>
+            <p:cNvPr id="33" name="타원 32">
+              <a:extLst>
+                <a:ext uri="{FF2B5EF4-FFF2-40B4-BE49-F238E27FC236}">
+                  <a16:creationId xmlns:a16="http://schemas.microsoft.com/office/drawing/2014/main" id="{4C86D172-C241-2595-238E-E2068D4B61AD}"/>
+                </a:ext>
+              </a:extLst>
+            </p:cNvPr>
+            <p:cNvSpPr/>
+            <p:nvPr/>
+          </p:nvSpPr>
+          <p:spPr>
+            <a:xfrm>
+              <a:off x="10801350" y="755650"/>
+              <a:ext cx="266700" cy="266700"/>
+            </a:xfrm>
+            <a:prstGeom prst="ellipse">
+              <a:avLst/>
+            </a:prstGeom>
+            <a:grpFill/>
+            <a:ln>
+              <a:noFill/>
+            </a:ln>
+          </p:spPr>
+          <p:style>
+            <a:lnRef idx="2">
+              <a:schemeClr val="accent1">
+                <a:shade val="15000"/>
+              </a:schemeClr>
+            </a:lnRef>
+            <a:fillRef idx="1">
+              <a:schemeClr val="accent1"/>
+            </a:fillRef>
+            <a:effectRef idx="0">
+              <a:schemeClr val="accent1"/>
+            </a:effectRef>
+            <a:fontRef idx="minor">
+              <a:schemeClr val="lt1"/>
+            </a:fontRef>
+          </p:style>
+          <p:txBody>
+            <a:bodyPr rtlCol="0" anchor="ctr"/>
+            <a:lstStyle/>
+            <a:p>
+              <a:pPr algn="ctr"/>
+              <a:endParaRPr lang="ko-KR" altLang="en-US"/>
+            </a:p>
+          </p:txBody>
+        </p:sp>
+      </p:grpSp>
+      <p:sp>
+        <p:nvSpPr>
+          <p:cNvPr id="34" name="TextBox 33">
+            <a:extLst>
+              <a:ext uri="{FF2B5EF4-FFF2-40B4-BE49-F238E27FC236}">
+                <a16:creationId xmlns:a16="http://schemas.microsoft.com/office/drawing/2014/main" id="{6DE8CBD1-73F5-7518-C206-D619046311F5}"/>
+              </a:ext>
+            </a:extLst>
+          </p:cNvPr>
+          <p:cNvSpPr txBox="1"/>
+          <p:nvPr/>
+        </p:nvSpPr>
+        <p:spPr>
+          <a:xfrm>
+            <a:off x="4532475" y="5589987"/>
+            <a:ext cx="441146" cy="246221"/>
+          </a:xfrm>
+          <a:prstGeom prst="rect">
+            <a:avLst/>
+          </a:prstGeom>
+          <a:noFill/>
+        </p:spPr>
+        <p:txBody>
+          <a:bodyPr wrap="none" rtlCol="0">
+            <a:spAutoFit/>
+          </a:bodyPr>
+          <a:lstStyle/>
+          <a:p>
+            <a:r>
+              <a:rPr lang="ko-KR" altLang="en-US" sz="1000" b="1"/>
+              <a:t>학생</a:t>
+            </a:r>
+            <a:endParaRPr lang="ko-KR" altLang="en-US" sz="1000" b="1" dirty="0"/>
+          </a:p>
+        </p:txBody>
+      </p:sp>
+      <p:sp>
+        <p:nvSpPr>
+          <p:cNvPr id="35" name="화살표: 오른쪽 34">
+            <a:extLst>
+              <a:ext uri="{FF2B5EF4-FFF2-40B4-BE49-F238E27FC236}">
+                <a16:creationId xmlns:a16="http://schemas.microsoft.com/office/drawing/2014/main" id="{1FF16F5D-B549-6BA5-CCCF-9F6383F5F060}"/>
+              </a:ext>
+            </a:extLst>
+          </p:cNvPr>
+          <p:cNvSpPr/>
+          <p:nvPr/>
+        </p:nvSpPr>
+        <p:spPr>
+          <a:xfrm>
+            <a:off x="2672861" y="2209307"/>
+            <a:ext cx="269630" cy="360485"/>
+          </a:xfrm>
+          <a:prstGeom prst="rightArrow">
+            <a:avLst/>
+          </a:prstGeom>
+          <a:solidFill>
+            <a:schemeClr val="accent6">
+              <a:lumMod val="75000"/>
+            </a:schemeClr>
+          </a:solidFill>
+        </p:spPr>
+        <p:style>
+          <a:lnRef idx="2">
+            <a:schemeClr val="accent1">
+              <a:shade val="15000"/>
+            </a:schemeClr>
+          </a:lnRef>
+          <a:fillRef idx="1">
+            <a:schemeClr val="accent1"/>
+          </a:fillRef>
+          <a:effectRef idx="0">
+            <a:schemeClr val="accent1"/>
+          </a:effectRef>
+          <a:fontRef idx="minor">
+            <a:schemeClr val="lt1"/>
+          </a:fontRef>
+        </p:style>
+        <p:txBody>
+          <a:bodyPr rtlCol="0" anchor="ctr"/>
+          <a:lstStyle/>
+          <a:p>
+            <a:pPr algn="ctr"/>
+            <a:endParaRPr lang="ko-KR" altLang="en-US" sz="1400"/>
+          </a:p>
+        </p:txBody>
+      </p:sp>
+      <p:sp>
+        <p:nvSpPr>
+          <p:cNvPr id="36" name="직사각형 35">
+            <a:extLst>
+              <a:ext uri="{FF2B5EF4-FFF2-40B4-BE49-F238E27FC236}">
+                <a16:creationId xmlns:a16="http://schemas.microsoft.com/office/drawing/2014/main" id="{F612FA25-21E0-0A26-1EC5-70532E896EF5}"/>
+              </a:ext>
+            </a:extLst>
+          </p:cNvPr>
+          <p:cNvSpPr/>
+          <p:nvPr/>
+        </p:nvSpPr>
+        <p:spPr>
+          <a:xfrm>
+            <a:off x="5287108" y="1968496"/>
+            <a:ext cx="1617784" cy="800100"/>
+          </a:xfrm>
+          <a:prstGeom prst="rect">
+            <a:avLst/>
+          </a:prstGeom>
+          <a:solidFill>
+            <a:schemeClr val="accent6">
+              <a:lumMod val="75000"/>
+            </a:schemeClr>
+          </a:solidFill>
+        </p:spPr>
+        <p:style>
+          <a:lnRef idx="2">
+            <a:schemeClr val="accent1">
+              <a:shade val="15000"/>
+            </a:schemeClr>
+          </a:lnRef>
+          <a:fillRef idx="1">
+            <a:schemeClr val="accent1"/>
+          </a:fillRef>
+          <a:effectRef idx="0">
+            <a:schemeClr val="accent1"/>
+          </a:effectRef>
+          <a:fontRef idx="minor">
+            <a:schemeClr val="lt1"/>
+          </a:fontRef>
+        </p:style>
+        <p:txBody>
+          <a:bodyPr wrap="none" rtlCol="0" anchor="ctr"/>
+          <a:lstStyle/>
+          <a:p>
+            <a:pPr algn="ctr"/>
+            <a:r>
+              <a:rPr lang="en-US" altLang="ko-KR" sz="1400" dirty="0"/>
+              <a:t>HTML </a:t>
+            </a:r>
+            <a:r>
+              <a:rPr lang="ko-KR" altLang="en-US" sz="1400" dirty="0"/>
+              <a:t>문항 생성</a:t>
+            </a:r>
+            <a:endParaRPr lang="en-US" altLang="ko-KR" sz="1400" dirty="0"/>
+          </a:p>
+          <a:p>
+            <a:pPr algn="ctr"/>
+            <a:r>
+              <a:rPr lang="en-US" altLang="ko-KR" sz="1400" dirty="0"/>
+              <a:t>(</a:t>
+            </a:r>
+            <a:r>
+              <a:rPr lang="ko-KR" altLang="en-US" sz="1400" dirty="0"/>
+              <a:t>문항 </a:t>
+            </a:r>
+            <a:r>
+              <a:rPr lang="en-US" altLang="ko-KR" sz="1400" dirty="0"/>
+              <a:t>DB)</a:t>
+            </a:r>
+            <a:endParaRPr lang="ko-KR" altLang="en-US" sz="1400" dirty="0"/>
+          </a:p>
+        </p:txBody>
+      </p:sp>
+      <p:sp>
+        <p:nvSpPr>
+          <p:cNvPr id="37" name="직사각형 36">
+            <a:extLst>
+              <a:ext uri="{FF2B5EF4-FFF2-40B4-BE49-F238E27FC236}">
+                <a16:creationId xmlns:a16="http://schemas.microsoft.com/office/drawing/2014/main" id="{314FE4C8-7943-2D22-C006-2B3B7805509A}"/>
+              </a:ext>
+            </a:extLst>
+          </p:cNvPr>
+          <p:cNvSpPr/>
+          <p:nvPr/>
+        </p:nvSpPr>
+        <p:spPr>
+          <a:xfrm>
+            <a:off x="7519866" y="1960192"/>
+            <a:ext cx="1617784" cy="800100"/>
+          </a:xfrm>
+          <a:prstGeom prst="rect">
+            <a:avLst/>
+          </a:prstGeom>
+          <a:solidFill>
+            <a:schemeClr val="accent6">
+              <a:lumMod val="75000"/>
+            </a:schemeClr>
+          </a:solidFill>
+        </p:spPr>
+        <p:style>
+          <a:lnRef idx="2">
+            <a:schemeClr val="accent1">
+              <a:shade val="15000"/>
+            </a:schemeClr>
+          </a:lnRef>
+          <a:fillRef idx="1">
+            <a:schemeClr val="accent1"/>
+          </a:fillRef>
+          <a:effectRef idx="0">
+            <a:schemeClr val="accent1"/>
+          </a:effectRef>
+          <a:fontRef idx="minor">
+            <a:schemeClr val="lt1"/>
+          </a:fontRef>
+        </p:style>
+        <p:txBody>
+          <a:bodyPr wrap="none" rtlCol="0" anchor="ctr"/>
+          <a:lstStyle/>
+          <a:p>
+            <a:pPr algn="ctr">
+              <a:lnSpc>
+                <a:spcPct val="150000"/>
+              </a:lnSpc>
+            </a:pPr>
+            <a:r>
+              <a:rPr lang="en-US" altLang="ko-KR" sz="1400" dirty="0"/>
+              <a:t>HTML </a:t>
+            </a:r>
+            <a:r>
+              <a:rPr lang="ko-KR" altLang="en-US" sz="1400" dirty="0"/>
+              <a:t>시험지 생성</a:t>
+            </a:r>
+            <a:endParaRPr lang="en-US" altLang="ko-KR" sz="1400" dirty="0"/>
+          </a:p>
+          <a:p>
+            <a:pPr algn="ctr">
+              <a:lnSpc>
+                <a:spcPct val="150000"/>
+              </a:lnSpc>
+            </a:pPr>
+            <a:r>
+              <a:rPr lang="en-US" altLang="ko-KR" sz="1400" dirty="0"/>
+              <a:t>(N</a:t>
+            </a:r>
+            <a:r>
+              <a:rPr lang="ko-KR" altLang="en-US" sz="1400" dirty="0"/>
+              <a:t>개 문항 집단</a:t>
+            </a:r>
+            <a:r>
+              <a:rPr lang="en-US" altLang="ko-KR" sz="1400" dirty="0"/>
+              <a:t>)</a:t>
+            </a:r>
+            <a:endParaRPr lang="ko-KR" altLang="en-US" sz="1400" dirty="0"/>
+          </a:p>
+        </p:txBody>
+      </p:sp>
+      <p:sp>
+        <p:nvSpPr>
+          <p:cNvPr id="38" name="직사각형 37">
+            <a:extLst>
+              <a:ext uri="{FF2B5EF4-FFF2-40B4-BE49-F238E27FC236}">
+                <a16:creationId xmlns:a16="http://schemas.microsoft.com/office/drawing/2014/main" id="{5635DE78-96A8-23D9-C0F1-40ED6AD2BD68}"/>
+              </a:ext>
+            </a:extLst>
+          </p:cNvPr>
+          <p:cNvSpPr/>
+          <p:nvPr/>
+        </p:nvSpPr>
+        <p:spPr>
+          <a:xfrm>
+            <a:off x="9796096" y="1960192"/>
+            <a:ext cx="1617784" cy="800100"/>
+          </a:xfrm>
+          <a:prstGeom prst="rect">
+            <a:avLst/>
+          </a:prstGeom>
+          <a:solidFill>
+            <a:schemeClr val="accent6">
+              <a:lumMod val="75000"/>
+            </a:schemeClr>
+          </a:solidFill>
+        </p:spPr>
+        <p:style>
+          <a:lnRef idx="2">
+            <a:schemeClr val="accent1">
+              <a:shade val="15000"/>
+            </a:schemeClr>
+          </a:lnRef>
+          <a:fillRef idx="1">
+            <a:schemeClr val="accent1"/>
+          </a:fillRef>
+          <a:effectRef idx="0">
+            <a:schemeClr val="accent1"/>
+          </a:effectRef>
+          <a:fontRef idx="minor">
+            <a:schemeClr val="lt1"/>
+          </a:fontRef>
+        </p:style>
+        <p:txBody>
+          <a:bodyPr wrap="none" rtlCol="0" anchor="ctr"/>
+          <a:lstStyle/>
+          <a:p>
+            <a:pPr algn="ctr">
+              <a:lnSpc>
+                <a:spcPct val="150000"/>
+              </a:lnSpc>
+            </a:pPr>
+            <a:r>
+              <a:rPr lang="en-US" altLang="ko-KR" sz="1400" dirty="0"/>
+              <a:t>HWP </a:t>
+            </a:r>
+            <a:r>
+              <a:rPr lang="ko-KR" altLang="en-US" sz="1400" dirty="0"/>
+              <a:t>시험지</a:t>
+            </a:r>
+            <a:endParaRPr lang="en-US" altLang="ko-KR" sz="1400" dirty="0"/>
+          </a:p>
+          <a:p>
+            <a:pPr algn="ctr">
+              <a:lnSpc>
+                <a:spcPct val="150000"/>
+              </a:lnSpc>
+            </a:pPr>
+            <a:r>
+              <a:rPr lang="ko-KR" altLang="en-US" sz="1400" dirty="0"/>
+              <a:t>생성</a:t>
+            </a:r>
+          </a:p>
+        </p:txBody>
+      </p:sp>
+      <p:sp>
+        <p:nvSpPr>
+          <p:cNvPr id="39" name="화살표: 오른쪽 38">
+            <a:extLst>
+              <a:ext uri="{FF2B5EF4-FFF2-40B4-BE49-F238E27FC236}">
+                <a16:creationId xmlns:a16="http://schemas.microsoft.com/office/drawing/2014/main" id="{9F020A4B-A848-66BA-6AC1-62417E549B5E}"/>
+              </a:ext>
+            </a:extLst>
+          </p:cNvPr>
+          <p:cNvSpPr/>
+          <p:nvPr/>
+        </p:nvSpPr>
+        <p:spPr>
+          <a:xfrm>
+            <a:off x="4865077" y="2209307"/>
+            <a:ext cx="269630" cy="360485"/>
+          </a:xfrm>
+          <a:prstGeom prst="rightArrow">
+            <a:avLst/>
+          </a:prstGeom>
+          <a:solidFill>
+            <a:schemeClr val="accent6">
+              <a:lumMod val="75000"/>
+            </a:schemeClr>
+          </a:solidFill>
+        </p:spPr>
+        <p:style>
+          <a:lnRef idx="2">
+            <a:schemeClr val="accent1">
+              <a:shade val="15000"/>
+            </a:schemeClr>
+          </a:lnRef>
+          <a:fillRef idx="1">
+            <a:schemeClr val="accent1"/>
+          </a:fillRef>
+          <a:effectRef idx="0">
+            <a:schemeClr val="accent1"/>
+          </a:effectRef>
+          <a:fontRef idx="minor">
+            <a:schemeClr val="lt1"/>
+          </a:fontRef>
+        </p:style>
+        <p:txBody>
+          <a:bodyPr rtlCol="0" anchor="ctr"/>
+          <a:lstStyle/>
+          <a:p>
+            <a:pPr algn="ctr"/>
+            <a:endParaRPr lang="ko-KR" altLang="en-US" sz="1400"/>
+          </a:p>
+        </p:txBody>
+      </p:sp>
+      <p:sp>
+        <p:nvSpPr>
+          <p:cNvPr id="40" name="화살표: 오른쪽 39">
+            <a:extLst>
+              <a:ext uri="{FF2B5EF4-FFF2-40B4-BE49-F238E27FC236}">
+                <a16:creationId xmlns:a16="http://schemas.microsoft.com/office/drawing/2014/main" id="{1D67510E-672C-F894-8B6C-1E410170F752}"/>
+              </a:ext>
+            </a:extLst>
+          </p:cNvPr>
+          <p:cNvSpPr/>
+          <p:nvPr/>
+        </p:nvSpPr>
+        <p:spPr>
+          <a:xfrm>
+            <a:off x="7076341" y="2209307"/>
+            <a:ext cx="269630" cy="360485"/>
+          </a:xfrm>
+          <a:prstGeom prst="rightArrow">
+            <a:avLst/>
+          </a:prstGeom>
+          <a:solidFill>
+            <a:schemeClr val="accent6">
+              <a:lumMod val="75000"/>
+            </a:schemeClr>
+          </a:solidFill>
+        </p:spPr>
+        <p:style>
+          <a:lnRef idx="2">
+            <a:schemeClr val="accent1">
+              <a:shade val="15000"/>
+            </a:schemeClr>
+          </a:lnRef>
+          <a:fillRef idx="1">
+            <a:schemeClr val="accent1"/>
+          </a:fillRef>
+          <a:effectRef idx="0">
+            <a:schemeClr val="accent1"/>
+          </a:effectRef>
+          <a:fontRef idx="minor">
+            <a:schemeClr val="lt1"/>
+          </a:fontRef>
+        </p:style>
+        <p:txBody>
+          <a:bodyPr rtlCol="0" anchor="ctr"/>
+          <a:lstStyle/>
+          <a:p>
+            <a:pPr algn="ctr"/>
+            <a:endParaRPr lang="ko-KR" altLang="en-US" sz="1400"/>
+          </a:p>
+        </p:txBody>
+      </p:sp>
+      <p:sp>
+        <p:nvSpPr>
+          <p:cNvPr id="41" name="화살표: 오른쪽 40">
+            <a:extLst>
+              <a:ext uri="{FF2B5EF4-FFF2-40B4-BE49-F238E27FC236}">
+                <a16:creationId xmlns:a16="http://schemas.microsoft.com/office/drawing/2014/main" id="{1F482813-D7BC-BDCA-F221-C7EAED71FAF6}"/>
+              </a:ext>
+            </a:extLst>
+          </p:cNvPr>
+          <p:cNvSpPr/>
+          <p:nvPr/>
+        </p:nvSpPr>
+        <p:spPr>
+          <a:xfrm>
+            <a:off x="9294936" y="2209307"/>
+            <a:ext cx="269630" cy="360485"/>
+          </a:xfrm>
+          <a:prstGeom prst="rightArrow">
+            <a:avLst/>
+          </a:prstGeom>
+          <a:solidFill>
+            <a:schemeClr val="accent6">
+              <a:lumMod val="75000"/>
+            </a:schemeClr>
+          </a:solidFill>
+        </p:spPr>
+        <p:style>
+          <a:lnRef idx="2">
+            <a:schemeClr val="accent1">
+              <a:shade val="15000"/>
+            </a:schemeClr>
+          </a:lnRef>
+          <a:fillRef idx="1">
+            <a:schemeClr val="accent1"/>
+          </a:fillRef>
+          <a:effectRef idx="0">
+            <a:schemeClr val="accent1"/>
+          </a:effectRef>
+          <a:fontRef idx="minor">
+            <a:schemeClr val="lt1"/>
+          </a:fontRef>
+        </p:style>
+        <p:txBody>
+          <a:bodyPr rtlCol="0" anchor="ctr"/>
+          <a:lstStyle/>
+          <a:p>
+            <a:pPr algn="ctr"/>
+            <a:endParaRPr lang="ko-KR" altLang="en-US" sz="1400"/>
+          </a:p>
+        </p:txBody>
+      </p:sp>
+      <p:sp>
+        <p:nvSpPr>
+          <p:cNvPr id="45" name="TextBox 44">
+            <a:extLst>
+              <a:ext uri="{FF2B5EF4-FFF2-40B4-BE49-F238E27FC236}">
+                <a16:creationId xmlns:a16="http://schemas.microsoft.com/office/drawing/2014/main" id="{057D5F1C-FDFB-E558-D9AA-CF7819190CAC}"/>
+              </a:ext>
+            </a:extLst>
+          </p:cNvPr>
+          <p:cNvSpPr txBox="1"/>
+          <p:nvPr/>
+        </p:nvSpPr>
+        <p:spPr>
+          <a:xfrm>
+            <a:off x="244403" y="2002199"/>
+            <a:ext cx="569387" cy="246221"/>
+          </a:xfrm>
+          <a:prstGeom prst="rect">
+            <a:avLst/>
+          </a:prstGeom>
+          <a:noFill/>
+        </p:spPr>
+        <p:txBody>
+          <a:bodyPr wrap="none" rtlCol="0">
+            <a:spAutoFit/>
+          </a:bodyPr>
+          <a:lstStyle/>
+          <a:p>
+            <a:r>
+              <a:rPr lang="ko-KR" altLang="en-US" sz="1000" b="1" dirty="0"/>
+              <a:t>시스템</a:t>
+            </a:r>
+          </a:p>
+        </p:txBody>
+      </p:sp>
+      <p:pic>
+        <p:nvPicPr>
+          <p:cNvPr id="47" name="그래픽 46" descr="톱니바퀴 단색으로 채워진">
+            <a:extLst>
+              <a:ext uri="{FF2B5EF4-FFF2-40B4-BE49-F238E27FC236}">
+                <a16:creationId xmlns:a16="http://schemas.microsoft.com/office/drawing/2014/main" id="{786088AE-4A74-552F-90A6-85B98FE14972}"/>
+              </a:ext>
+            </a:extLst>
+          </p:cNvPr>
+          <p:cNvPicPr>
+            <a:picLocks noChangeAspect="1"/>
+          </p:cNvPicPr>
+          <p:nvPr/>
+        </p:nvPicPr>
+        <p:blipFill>
+          <a:blip>
+            <a:extLst>
+              <a:ext uri="{96DAC541-7B7A-43D3-8B79-37D633B846F1}">
+                <asvg:svgBlip xmlns:asvg="http://schemas.microsoft.com/office/drawing/2016/SVG/main" r:embed="rId2"/>
+              </a:ext>
+            </a:extLst>
+          </a:blip>
+          <a:stretch>
+            <a:fillRect/>
+          </a:stretch>
+        </p:blipFill>
+        <p:spPr>
+          <a:xfrm>
+            <a:off x="250877" y="2209307"/>
+            <a:ext cx="494513" cy="494513"/>
+          </a:xfrm>
+          <a:prstGeom prst="rect">
+            <a:avLst/>
+          </a:prstGeom>
+        </p:spPr>
+      </p:pic>
+      <p:sp>
+        <p:nvSpPr>
+          <p:cNvPr id="48" name="TextBox 47">
+            <a:extLst>
+              <a:ext uri="{FF2B5EF4-FFF2-40B4-BE49-F238E27FC236}">
+                <a16:creationId xmlns:a16="http://schemas.microsoft.com/office/drawing/2014/main" id="{A729E18F-A9FA-25D2-2913-1CF3D870029E}"/>
+              </a:ext>
+            </a:extLst>
+          </p:cNvPr>
+          <p:cNvSpPr txBox="1"/>
+          <p:nvPr/>
+        </p:nvSpPr>
+        <p:spPr>
+          <a:xfrm>
+            <a:off x="152400" y="433387"/>
+            <a:ext cx="4996881" cy="369332"/>
+          </a:xfrm>
+          <a:prstGeom prst="rect">
+            <a:avLst/>
+          </a:prstGeom>
+          <a:noFill/>
+        </p:spPr>
+        <p:txBody>
+          <a:bodyPr wrap="none" rtlCol="0">
+            <a:spAutoFit/>
+          </a:bodyPr>
+          <a:lstStyle/>
+          <a:p>
+            <a:r>
+              <a:rPr lang="ko-KR" altLang="en-US" b="1" dirty="0"/>
+              <a:t>출제 마법사에서 구현하고자 하는 사용자 </a:t>
+            </a:r>
+            <a:r>
+              <a:rPr lang="en-US" altLang="ko-KR" b="1" dirty="0"/>
+              <a:t>Flow</a:t>
+            </a:r>
+            <a:endParaRPr lang="ko-KR" altLang="en-US" b="1" dirty="0"/>
+          </a:p>
+        </p:txBody>
+      </p:sp>
+      <p:sp>
+        <p:nvSpPr>
+          <p:cNvPr id="49" name="화살표: 아래쪽 48">
+            <a:extLst>
+              <a:ext uri="{FF2B5EF4-FFF2-40B4-BE49-F238E27FC236}">
+                <a16:creationId xmlns:a16="http://schemas.microsoft.com/office/drawing/2014/main" id="{62A2454C-40CA-ED79-6047-A73A374BEF77}"/>
+              </a:ext>
+            </a:extLst>
+          </p:cNvPr>
+          <p:cNvSpPr/>
+          <p:nvPr/>
+        </p:nvSpPr>
+        <p:spPr>
+          <a:xfrm rot="4384872">
+            <a:off x="9876942" y="426907"/>
+            <a:ext cx="361950" cy="1065219"/>
+          </a:xfrm>
+          <a:prstGeom prst="downArrow">
+            <a:avLst/>
+          </a:prstGeom>
+          <a:noFill/>
+          <a:ln>
+            <a:prstDash val="dash"/>
+          </a:ln>
+        </p:spPr>
+        <p:style>
+          <a:lnRef idx="2">
+            <a:schemeClr val="accent1">
+              <a:shade val="15000"/>
+            </a:schemeClr>
+          </a:lnRef>
+          <a:fillRef idx="1">
+            <a:schemeClr val="accent1"/>
+          </a:fillRef>
+          <a:effectRef idx="0">
+            <a:schemeClr val="accent1"/>
+          </a:effectRef>
+          <a:fontRef idx="minor">
+            <a:schemeClr val="lt1"/>
+          </a:fontRef>
+        </p:style>
+        <p:txBody>
+          <a:bodyPr rtlCol="0" anchor="ctr"/>
+          <a:lstStyle/>
+          <a:p>
+            <a:pPr algn="ctr"/>
+            <a:endParaRPr lang="ko-KR" altLang="en-US"/>
+          </a:p>
+        </p:txBody>
+      </p:sp>
+      <p:sp>
+        <p:nvSpPr>
+          <p:cNvPr id="50" name="직사각형 49">
+            <a:extLst>
+              <a:ext uri="{FF2B5EF4-FFF2-40B4-BE49-F238E27FC236}">
+                <a16:creationId xmlns:a16="http://schemas.microsoft.com/office/drawing/2014/main" id="{A8DB60E7-367A-9292-B5A0-00BB466F78B5}"/>
+              </a:ext>
+            </a:extLst>
+          </p:cNvPr>
+          <p:cNvSpPr/>
+          <p:nvPr/>
+        </p:nvSpPr>
+        <p:spPr>
+          <a:xfrm>
+            <a:off x="10391043" y="159416"/>
+            <a:ext cx="1617784" cy="800100"/>
+          </a:xfrm>
+          <a:prstGeom prst="rect">
+            <a:avLst/>
+          </a:prstGeom>
+          <a:solidFill>
+            <a:schemeClr val="bg1"/>
+          </a:solidFill>
+          <a:ln>
+            <a:prstDash val="dash"/>
+          </a:ln>
+        </p:spPr>
+        <p:style>
+          <a:lnRef idx="2">
+            <a:schemeClr val="accent1">
+              <a:shade val="15000"/>
+            </a:schemeClr>
+          </a:lnRef>
+          <a:fillRef idx="1">
+            <a:schemeClr val="accent1"/>
+          </a:fillRef>
+          <a:effectRef idx="0">
+            <a:schemeClr val="accent1"/>
+          </a:effectRef>
+          <a:fontRef idx="minor">
+            <a:schemeClr val="lt1"/>
+          </a:fontRef>
+        </p:style>
+        <p:txBody>
+          <a:bodyPr rtlCol="0" anchor="ctr"/>
+          <a:lstStyle/>
+          <a:p>
+            <a:pPr algn="ctr">
+              <a:lnSpc>
+                <a:spcPct val="150000"/>
+              </a:lnSpc>
+            </a:pPr>
+            <a:r>
+              <a:rPr lang="en-US" altLang="ko-KR" sz="1050" dirty="0">
+                <a:solidFill>
+                  <a:schemeClr val="tx1"/>
+                </a:solidFill>
+              </a:rPr>
+              <a:t>CMS</a:t>
+            </a:r>
+            <a:endParaRPr lang="ko-KR" altLang="en-US" sz="1050" dirty="0">
+              <a:solidFill>
+                <a:schemeClr val="tx1"/>
+              </a:solidFill>
+            </a:endParaRPr>
+          </a:p>
+        </p:txBody>
+      </p:sp>
+    </p:spTree>
+    <p:extLst>
+      <p:ext uri="{BB962C8B-B14F-4D97-AF65-F5344CB8AC3E}">
+        <p14:creationId xmlns:p14="http://schemas.microsoft.com/office/powerpoint/2010/main" val="1400575918"/>
+      </p:ext>
+    </p:extLst>
+  </p:cSld>
+  <p:clrMapOvr>
+    <a:masterClrMapping/>
+  </p:clrMapOvr>
+</p:sld>
+</file>
+
+<file path=ppt/slides/slide2.xml><?xml version="1.0" encoding="utf-8"?>
+<p:sld xmlns:a="http://schemas.openxmlformats.org/drawingml/2006/main" xmlns:r="http://schemas.openxmlformats.org/officeDocument/2006/relationships" xmlns:p="http://schemas.openxmlformats.org/presentationml/2006/main">
+  <p:cSld>
+    <p:spTree>
+      <p:nvGrpSpPr>
+        <p:cNvPr id="1" name=""/>
+        <p:cNvGrpSpPr/>
+        <p:nvPr/>
+      </p:nvGrpSpPr>
+      <p:grpSpPr>
+        <a:xfrm>
+          <a:off x="0" y="0"/>
+          <a:ext cx="0" cy="0"/>
+          <a:chOff x="0" y="0"/>
+          <a:chExt cx="0" cy="0"/>
+        </a:xfrm>
+      </p:grpSpPr>
+      <p:sp>
+        <p:nvSpPr>
+          <p:cNvPr id="4" name="직사각형 3">
+            <a:extLst>
+              <a:ext uri="{FF2B5EF4-FFF2-40B4-BE49-F238E27FC236}">
                 <a16:creationId xmlns:a16="http://schemas.microsoft.com/office/drawing/2014/main" id="{DA91CF3A-4E84-6A5F-8780-7421B86DA7B6}"/>
               </a:ext>
             </a:extLst>
@@ -3514,7 +5523,7 @@
         <p:spPr>
           <a:xfrm>
             <a:off x="376261" y="2373687"/>
-            <a:ext cx="1316386" cy="437877"/>
+            <a:ext cx="1348446" cy="437877"/>
           </a:xfrm>
           <a:prstGeom prst="rect">
             <a:avLst/>
@@ -3534,7 +5543,15 @@
             </a:pPr>
             <a:r>
               <a:rPr lang="ko-KR" altLang="en-US" sz="800" dirty="0"/>
-              <a:t>메타정보문항 속성</a:t>
+              <a:t>메타정보</a:t>
+            </a:r>
+            <a:r>
+              <a:rPr lang="en-US" altLang="ko-KR" sz="800" dirty="0"/>
+              <a:t>(</a:t>
+            </a:r>
+            <a:r>
+              <a:rPr lang="ko-KR" altLang="en-US" sz="800" dirty="0"/>
+              <a:t>문항 속성</a:t>
             </a:r>
             <a:r>
               <a:rPr lang="en-US" altLang="ko-KR" sz="800" dirty="0"/>
@@ -5581,7 +7598,7 @@
         </p:nvSpPr>
         <p:spPr>
           <a:xfrm>
-            <a:off x="9947303" y="1299666"/>
+            <a:off x="10040211" y="1299666"/>
             <a:ext cx="734496" cy="253211"/>
           </a:xfrm>
           <a:prstGeom prst="rect">
@@ -5665,7 +7682,7 @@
         </p:nvSpPr>
         <p:spPr>
           <a:xfrm>
-            <a:off x="9888908" y="1524219"/>
+            <a:off x="9831923" y="1524219"/>
             <a:ext cx="877163" cy="253211"/>
           </a:xfrm>
           <a:prstGeom prst="rect">
@@ -5716,7 +7733,7 @@
         </p:nvCxnSpPr>
         <p:spPr>
           <a:xfrm flipH="1">
-            <a:off x="9696647" y="2461208"/>
+            <a:off x="9696647" y="2683343"/>
             <a:ext cx="1301750" cy="0"/>
           </a:xfrm>
           <a:prstGeom prst="straightConnector1">
@@ -5741,6 +7758,47 @@
           </a:fontRef>
         </p:style>
       </p:cxnSp>
+      <p:cxnSp>
+        <p:nvCxnSpPr>
+          <p:cNvPr id="79" name="직선 화살표 연결선 78">
+            <a:extLst>
+              <a:ext uri="{FF2B5EF4-FFF2-40B4-BE49-F238E27FC236}">
+                <a16:creationId xmlns:a16="http://schemas.microsoft.com/office/drawing/2014/main" id="{B27DF8EE-931C-F05E-F962-43496011A7DB}"/>
+              </a:ext>
+            </a:extLst>
+          </p:cNvPr>
+          <p:cNvCxnSpPr>
+            <a:cxnSpLocks/>
+          </p:cNvCxnSpPr>
+          <p:nvPr/>
+        </p:nvCxnSpPr>
+        <p:spPr>
+          <a:xfrm>
+            <a:off x="9738951" y="2458640"/>
+            <a:ext cx="1259446" cy="0"/>
+          </a:xfrm>
+          <a:prstGeom prst="straightConnector1">
+            <a:avLst/>
+          </a:prstGeom>
+          <a:ln w="9525">
+            <a:tailEnd type="triangle"/>
+          </a:ln>
+        </p:spPr>
+        <p:style>
+          <a:lnRef idx="2">
+            <a:schemeClr val="accent1"/>
+          </a:lnRef>
+          <a:fillRef idx="0">
+            <a:schemeClr val="accent1"/>
+          </a:fillRef>
+          <a:effectRef idx="1">
+            <a:schemeClr val="accent1"/>
+          </a:effectRef>
+          <a:fontRef idx="minor">
+            <a:schemeClr val="tx1"/>
+          </a:fontRef>
+        </p:style>
+      </p:cxnSp>
       <p:sp>
         <p:nvSpPr>
           <p:cNvPr id="78" name="TextBox 77">
@@ -5755,7 +7813,7 @@
         </p:nvSpPr>
         <p:spPr>
           <a:xfrm>
-            <a:off x="10001426" y="2305323"/>
+            <a:off x="9894448" y="2305323"/>
             <a:ext cx="734496" cy="253211"/>
           </a:xfrm>
           <a:prstGeom prst="rect">
@@ -5784,47 +7842,6 @@
           </a:p>
         </p:txBody>
       </p:sp>
-      <p:cxnSp>
-        <p:nvCxnSpPr>
-          <p:cNvPr id="79" name="직선 화살표 연결선 78">
-            <a:extLst>
-              <a:ext uri="{FF2B5EF4-FFF2-40B4-BE49-F238E27FC236}">
-                <a16:creationId xmlns:a16="http://schemas.microsoft.com/office/drawing/2014/main" id="{B27DF8EE-931C-F05E-F962-43496011A7DB}"/>
-              </a:ext>
-            </a:extLst>
-          </p:cNvPr>
-          <p:cNvCxnSpPr>
-            <a:cxnSpLocks/>
-          </p:cNvCxnSpPr>
-          <p:nvPr/>
-        </p:nvCxnSpPr>
-        <p:spPr>
-          <a:xfrm>
-            <a:off x="9738951" y="2670810"/>
-            <a:ext cx="1259446" cy="0"/>
-          </a:xfrm>
-          <a:prstGeom prst="straightConnector1">
-            <a:avLst/>
-          </a:prstGeom>
-          <a:ln w="9525">
-            <a:tailEnd type="triangle"/>
-          </a:ln>
-        </p:spPr>
-        <p:style>
-          <a:lnRef idx="2">
-            <a:schemeClr val="accent1"/>
-          </a:lnRef>
-          <a:fillRef idx="0">
-            <a:schemeClr val="accent1"/>
-          </a:fillRef>
-          <a:effectRef idx="1">
-            <a:schemeClr val="accent1"/>
-          </a:effectRef>
-          <a:fontRef idx="minor">
-            <a:schemeClr val="tx1"/>
-          </a:fontRef>
-        </p:style>
-      </p:cxnSp>
       <p:sp>
         <p:nvSpPr>
           <p:cNvPr id="80" name="TextBox 79">
@@ -5839,7 +7856,7 @@
         </p:nvSpPr>
         <p:spPr>
           <a:xfrm>
-            <a:off x="9943031" y="2529876"/>
+            <a:off x="10134928" y="2529876"/>
             <a:ext cx="635110" cy="253211"/>
           </a:xfrm>
           <a:prstGeom prst="rect">

--- a/00-1. human 놀이터/출제 마법사 구조.pptx
+++ b/00-1. human 놀이터/출제 마법사 구조.pptx
@@ -7,6 +7,7 @@
   <p:sldIdLst>
     <p:sldId id="257" r:id="rId2"/>
     <p:sldId id="256" r:id="rId3"/>
+    <p:sldId id="258" r:id="rId4"/>
   </p:sldIdLst>
   <p:sldSz cx="12192000" cy="6858000"/>
   <p:notesSz cx="6858000" cy="9144000"/>
@@ -105,6 +106,11 @@
       </a:defRPr>
     </a:lvl9pPr>
   </p:defaultTextStyle>
+  <p:extLst>
+    <p:ext uri="{EFAFB233-063F-42B5-8137-9DF3F51BA10A}">
+      <p15:sldGuideLst xmlns:p15="http://schemas.microsoft.com/office/powerpoint/2012/main"/>
+    </p:ext>
+  </p:extLst>
 </p:presentation>
 </file>
 
@@ -255,7 +261,7 @@
           <a:p>
             <a:fld id="{EEEB743A-7293-4ABF-BBC1-D85B03908227}" type="datetimeFigureOut">
               <a:rPr lang="ko-KR" altLang="en-US" smtClean="0"/>
-              <a:t>2026-04-01</a:t>
+              <a:t>2026-04-02</a:t>
             </a:fld>
             <a:endParaRPr lang="ko-KR" altLang="en-US"/>
           </a:p>
@@ -453,7 +459,7 @@
           <a:p>
             <a:fld id="{EEEB743A-7293-4ABF-BBC1-D85B03908227}" type="datetimeFigureOut">
               <a:rPr lang="ko-KR" altLang="en-US" smtClean="0"/>
-              <a:t>2026-04-01</a:t>
+              <a:t>2026-04-02</a:t>
             </a:fld>
             <a:endParaRPr lang="ko-KR" altLang="en-US"/>
           </a:p>
@@ -661,7 +667,7 @@
           <a:p>
             <a:fld id="{EEEB743A-7293-4ABF-BBC1-D85B03908227}" type="datetimeFigureOut">
               <a:rPr lang="ko-KR" altLang="en-US" smtClean="0"/>
-              <a:t>2026-04-01</a:t>
+              <a:t>2026-04-02</a:t>
             </a:fld>
             <a:endParaRPr lang="ko-KR" altLang="en-US"/>
           </a:p>
@@ -859,7 +865,7 @@
           <a:p>
             <a:fld id="{EEEB743A-7293-4ABF-BBC1-D85B03908227}" type="datetimeFigureOut">
               <a:rPr lang="ko-KR" altLang="en-US" smtClean="0"/>
-              <a:t>2026-04-01</a:t>
+              <a:t>2026-04-02</a:t>
             </a:fld>
             <a:endParaRPr lang="ko-KR" altLang="en-US"/>
           </a:p>
@@ -1134,7 +1140,7 @@
           <a:p>
             <a:fld id="{EEEB743A-7293-4ABF-BBC1-D85B03908227}" type="datetimeFigureOut">
               <a:rPr lang="ko-KR" altLang="en-US" smtClean="0"/>
-              <a:t>2026-04-01</a:t>
+              <a:t>2026-04-02</a:t>
             </a:fld>
             <a:endParaRPr lang="ko-KR" altLang="en-US"/>
           </a:p>
@@ -1399,7 +1405,7 @@
           <a:p>
             <a:fld id="{EEEB743A-7293-4ABF-BBC1-D85B03908227}" type="datetimeFigureOut">
               <a:rPr lang="ko-KR" altLang="en-US" smtClean="0"/>
-              <a:t>2026-04-01</a:t>
+              <a:t>2026-04-02</a:t>
             </a:fld>
             <a:endParaRPr lang="ko-KR" altLang="en-US"/>
           </a:p>
@@ -1811,7 +1817,7 @@
           <a:p>
             <a:fld id="{EEEB743A-7293-4ABF-BBC1-D85B03908227}" type="datetimeFigureOut">
               <a:rPr lang="ko-KR" altLang="en-US" smtClean="0"/>
-              <a:t>2026-04-01</a:t>
+              <a:t>2026-04-02</a:t>
             </a:fld>
             <a:endParaRPr lang="ko-KR" altLang="en-US"/>
           </a:p>
@@ -1952,7 +1958,7 @@
           <a:p>
             <a:fld id="{EEEB743A-7293-4ABF-BBC1-D85B03908227}" type="datetimeFigureOut">
               <a:rPr lang="ko-KR" altLang="en-US" smtClean="0"/>
-              <a:t>2026-04-01</a:t>
+              <a:t>2026-04-02</a:t>
             </a:fld>
             <a:endParaRPr lang="ko-KR" altLang="en-US"/>
           </a:p>
@@ -2065,7 +2071,7 @@
           <a:p>
             <a:fld id="{EEEB743A-7293-4ABF-BBC1-D85B03908227}" type="datetimeFigureOut">
               <a:rPr lang="ko-KR" altLang="en-US" smtClean="0"/>
-              <a:t>2026-04-01</a:t>
+              <a:t>2026-04-02</a:t>
             </a:fld>
             <a:endParaRPr lang="ko-KR" altLang="en-US"/>
           </a:p>
@@ -2376,7 +2382,7 @@
           <a:p>
             <a:fld id="{EEEB743A-7293-4ABF-BBC1-D85B03908227}" type="datetimeFigureOut">
               <a:rPr lang="ko-KR" altLang="en-US" smtClean="0"/>
-              <a:t>2026-04-01</a:t>
+              <a:t>2026-04-02</a:t>
             </a:fld>
             <a:endParaRPr lang="ko-KR" altLang="en-US"/>
           </a:p>
@@ -2664,7 +2670,7 @@
           <a:p>
             <a:fld id="{EEEB743A-7293-4ABF-BBC1-D85B03908227}" type="datetimeFigureOut">
               <a:rPr lang="ko-KR" altLang="en-US" smtClean="0"/>
-              <a:t>2026-04-01</a:t>
+              <a:t>2026-04-02</a:t>
             </a:fld>
             <a:endParaRPr lang="ko-KR" altLang="en-US"/>
           </a:p>
@@ -2905,7 +2911,7 @@
           <a:p>
             <a:fld id="{EEEB743A-7293-4ABF-BBC1-D85B03908227}" type="datetimeFigureOut">
               <a:rPr lang="ko-KR" altLang="en-US" smtClean="0"/>
-              <a:t>2026-04-01</a:t>
+              <a:t>2026-04-02</a:t>
             </a:fld>
             <a:endParaRPr lang="ko-KR" altLang="en-US"/>
           </a:p>
@@ -7897,6 +7903,314 @@
     <p:extLst>
       <p:ext uri="{BB962C8B-B14F-4D97-AF65-F5344CB8AC3E}">
         <p14:creationId xmlns:p14="http://schemas.microsoft.com/office/powerpoint/2010/main" val="181135887"/>
+      </p:ext>
+    </p:extLst>
+  </p:cSld>
+  <p:clrMapOvr>
+    <a:masterClrMapping/>
+  </p:clrMapOvr>
+</p:sld>
+</file>
+
+<file path=ppt/slides/slide3.xml><?xml version="1.0" encoding="utf-8"?>
+<p:sld xmlns:a="http://schemas.openxmlformats.org/drawingml/2006/main" xmlns:r="http://schemas.openxmlformats.org/officeDocument/2006/relationships" xmlns:p="http://schemas.openxmlformats.org/presentationml/2006/main">
+  <p:cSld>
+    <p:spTree>
+      <p:nvGrpSpPr>
+        <p:cNvPr id="1" name=""/>
+        <p:cNvGrpSpPr/>
+        <p:nvPr/>
+      </p:nvGrpSpPr>
+      <p:grpSpPr>
+        <a:xfrm>
+          <a:off x="0" y="0"/>
+          <a:ext cx="0" cy="0"/>
+          <a:chOff x="0" y="0"/>
+          <a:chExt cx="0" cy="0"/>
+        </a:xfrm>
+      </p:grpSpPr>
+      <p:sp>
+        <p:nvSpPr>
+          <p:cNvPr id="2" name="TextBox 1">
+            <a:extLst>
+              <a:ext uri="{FF2B5EF4-FFF2-40B4-BE49-F238E27FC236}">
+                <a16:creationId xmlns:a16="http://schemas.microsoft.com/office/drawing/2014/main" id="{87DB888D-AD5A-BE3F-A3C2-682C2B1F9E22}"/>
+              </a:ext>
+            </a:extLst>
+          </p:cNvPr>
+          <p:cNvSpPr txBox="1"/>
+          <p:nvPr/>
+        </p:nvSpPr>
+        <p:spPr>
+          <a:xfrm>
+            <a:off x="424543" y="404949"/>
+            <a:ext cx="5489003" cy="5544146"/>
+          </a:xfrm>
+          <a:prstGeom prst="rect">
+            <a:avLst/>
+          </a:prstGeom>
+          <a:noFill/>
+        </p:spPr>
+        <p:txBody>
+          <a:bodyPr wrap="none" rtlCol="0">
+            <a:spAutoFit/>
+          </a:bodyPr>
+          <a:lstStyle/>
+          <a:p>
+            <a:pPr marL="342900" indent="-342900">
+              <a:lnSpc>
+                <a:spcPct val="200000"/>
+              </a:lnSpc>
+              <a:buAutoNum type="arabicPeriod"/>
+            </a:pPr>
+            <a:r>
+              <a:rPr lang="ko-KR" altLang="en-US" dirty="0"/>
+              <a:t>기존 </a:t>
+            </a:r>
+            <a:r>
+              <a:rPr lang="en-US" altLang="ko-KR" dirty="0"/>
+              <a:t>CMS </a:t>
+            </a:r>
+            <a:r>
+              <a:rPr lang="ko-KR" altLang="en-US" dirty="0"/>
+              <a:t>분석 </a:t>
+            </a:r>
+            <a:r>
+              <a:rPr lang="en-US" altLang="ko-KR" dirty="0"/>
+              <a:t>_ </a:t>
+            </a:r>
+            <a:r>
+              <a:rPr lang="ko-KR" altLang="en-US" dirty="0"/>
+              <a:t>메타정보 리스트 체크</a:t>
+            </a:r>
+            <a:endParaRPr lang="en-US" altLang="ko-KR" dirty="0"/>
+          </a:p>
+          <a:p>
+            <a:pPr marL="342900" indent="-342900">
+              <a:lnSpc>
+                <a:spcPct val="200000"/>
+              </a:lnSpc>
+              <a:buAutoNum type="arabicPeriod"/>
+            </a:pPr>
+            <a:r>
+              <a:rPr lang="ko-KR" altLang="en-US" dirty="0"/>
+              <a:t>한글 파일 파싱으로 발생할 수 있는 데이터 체크</a:t>
+            </a:r>
+            <a:endParaRPr lang="en-US" altLang="ko-KR" dirty="0"/>
+          </a:p>
+          <a:p>
+            <a:pPr marL="342900" indent="-342900">
+              <a:lnSpc>
+                <a:spcPct val="200000"/>
+              </a:lnSpc>
+              <a:buAutoNum type="arabicPeriod"/>
+            </a:pPr>
+            <a:r>
+              <a:rPr lang="ko-KR" altLang="en-US" dirty="0"/>
+              <a:t>요구사항 분석 </a:t>
+            </a:r>
+            <a:br>
+              <a:rPr lang="en-US" altLang="ko-KR" dirty="0"/>
+            </a:br>
+            <a:r>
+              <a:rPr lang="en-US" altLang="ko-KR" dirty="0"/>
+              <a:t>1) </a:t>
+            </a:r>
+            <a:r>
+              <a:rPr lang="ko-KR" altLang="en-US" dirty="0"/>
+              <a:t>콘텐츠 관리 기능</a:t>
+            </a:r>
+            <a:br>
+              <a:rPr lang="en-US" altLang="ko-KR" dirty="0"/>
+            </a:br>
+            <a:r>
+              <a:rPr lang="en-US" altLang="ko-KR" dirty="0"/>
+              <a:t>	- </a:t>
+            </a:r>
+            <a:r>
+              <a:rPr lang="ko-KR" altLang="en-US" dirty="0"/>
+              <a:t>콘텐츠 등록</a:t>
+            </a:r>
+            <a:r>
+              <a:rPr lang="en-US" altLang="ko-KR" dirty="0"/>
+              <a:t>/</a:t>
+            </a:r>
+            <a:r>
+              <a:rPr lang="ko-KR" altLang="en-US" dirty="0"/>
+              <a:t>수정  </a:t>
+            </a:r>
+            <a:br>
+              <a:rPr lang="en-US" altLang="ko-KR" dirty="0"/>
+            </a:br>
+            <a:r>
+              <a:rPr lang="en-US" altLang="ko-KR" dirty="0"/>
+              <a:t>       - </a:t>
+            </a:r>
+            <a:r>
+              <a:rPr lang="ko-KR" altLang="en-US" dirty="0"/>
+              <a:t>콘텐츠 일괄 등록 </a:t>
+            </a:r>
+            <a:r>
+              <a:rPr lang="en-US" altLang="ko-KR" dirty="0"/>
+              <a:t>/ </a:t>
+            </a:r>
+            <a:r>
+              <a:rPr lang="ko-KR" altLang="en-US" dirty="0"/>
+              <a:t>현황</a:t>
+            </a:r>
+            <a:r>
+              <a:rPr lang="en-US" altLang="ko-KR" dirty="0"/>
+              <a:t>(</a:t>
+            </a:r>
+            <a:r>
+              <a:rPr lang="ko-KR" altLang="en-US" dirty="0"/>
+              <a:t>결과</a:t>
+            </a:r>
+            <a:r>
+              <a:rPr lang="en-US" altLang="ko-KR" dirty="0"/>
+              <a:t>)</a:t>
+            </a:r>
+            <a:r>
+              <a:rPr lang="ko-KR" altLang="en-US" dirty="0"/>
+              <a:t> 체크</a:t>
+            </a:r>
+            <a:br>
+              <a:rPr lang="en-US" altLang="ko-KR" dirty="0"/>
+            </a:br>
+            <a:r>
+              <a:rPr lang="en-US" altLang="ko-KR" dirty="0"/>
+              <a:t>2)</a:t>
+            </a:r>
+            <a:r>
+              <a:rPr lang="ko-KR" altLang="en-US" dirty="0"/>
+              <a:t> 서비스 관리를 위한 메타정보 분석</a:t>
+            </a:r>
+            <a:r>
+              <a:rPr lang="en-US" altLang="ko-KR" dirty="0"/>
+              <a:t>/</a:t>
+            </a:r>
+            <a:r>
+              <a:rPr lang="ko-KR" altLang="en-US" dirty="0"/>
+              <a:t>추가 </a:t>
+            </a:r>
+            <a:br>
+              <a:rPr lang="en-US" altLang="ko-KR" dirty="0"/>
+            </a:br>
+            <a:r>
+              <a:rPr lang="en-US" altLang="ko-KR" dirty="0"/>
+              <a:t>       - </a:t>
+            </a:r>
+            <a:r>
+              <a:rPr lang="ko-KR" altLang="en-US" dirty="0"/>
+              <a:t>프론트 기획 참고  </a:t>
+            </a:r>
+            <a:endParaRPr lang="en-US" altLang="ko-KR" dirty="0"/>
+          </a:p>
+          <a:p>
+            <a:pPr marL="342900" indent="-342900">
+              <a:lnSpc>
+                <a:spcPct val="200000"/>
+              </a:lnSpc>
+              <a:buAutoNum type="arabicPeriod"/>
+            </a:pPr>
+            <a:r>
+              <a:rPr lang="ko-KR" altLang="en-US" dirty="0"/>
+              <a:t>관리자 계정 권한 및 범위 설정</a:t>
+            </a:r>
+            <a:endParaRPr lang="en-US" altLang="ko-KR" dirty="0"/>
+          </a:p>
+          <a:p>
+            <a:pPr marL="342900" indent="-342900">
+              <a:lnSpc>
+                <a:spcPct val="200000"/>
+              </a:lnSpc>
+              <a:buAutoNum type="arabicPeriod"/>
+            </a:pPr>
+            <a:r>
+              <a:rPr lang="ko-KR" altLang="en-US" dirty="0"/>
+              <a:t>정책 설정</a:t>
+            </a:r>
+            <a:endParaRPr lang="en-US" altLang="ko-KR" dirty="0"/>
+          </a:p>
+        </p:txBody>
+      </p:sp>
+      <p:sp>
+        <p:nvSpPr>
+          <p:cNvPr id="3" name="TextBox 2">
+            <a:extLst>
+              <a:ext uri="{FF2B5EF4-FFF2-40B4-BE49-F238E27FC236}">
+                <a16:creationId xmlns:a16="http://schemas.microsoft.com/office/drawing/2014/main" id="{BC458296-7B14-FD75-36C4-EB790272FCC6}"/>
+              </a:ext>
+            </a:extLst>
+          </p:cNvPr>
+          <p:cNvSpPr txBox="1"/>
+          <p:nvPr/>
+        </p:nvSpPr>
+        <p:spPr>
+          <a:xfrm>
+            <a:off x="3516993" y="2570299"/>
+            <a:ext cx="3906839" cy="558166"/>
+          </a:xfrm>
+          <a:prstGeom prst="rect">
+            <a:avLst/>
+          </a:prstGeom>
+          <a:noFill/>
+        </p:spPr>
+        <p:txBody>
+          <a:bodyPr wrap="none" rtlCol="0">
+            <a:spAutoFit/>
+          </a:bodyPr>
+          <a:lstStyle/>
+          <a:p>
+            <a:pPr>
+              <a:lnSpc>
+                <a:spcPct val="200000"/>
+              </a:lnSpc>
+            </a:pPr>
+            <a:r>
+              <a:rPr lang="en-US" altLang="ko-KR" dirty="0">
+                <a:solidFill>
+                  <a:srgbClr val="FF0000"/>
+                </a:solidFill>
+              </a:rPr>
+              <a:t>※</a:t>
+            </a:r>
+            <a:r>
+              <a:rPr lang="ko-KR" altLang="en-US" dirty="0">
+                <a:solidFill>
+                  <a:srgbClr val="FF0000"/>
+                </a:solidFill>
+              </a:rPr>
+              <a:t> </a:t>
+            </a:r>
+            <a:r>
+              <a:rPr lang="ko-KR" altLang="en-US" dirty="0" err="1">
+                <a:solidFill>
+                  <a:srgbClr val="FF0000"/>
+                </a:solidFill>
+              </a:rPr>
+              <a:t>셋트</a:t>
+            </a:r>
+            <a:r>
+              <a:rPr lang="ko-KR" altLang="en-US" dirty="0">
+                <a:solidFill>
+                  <a:srgbClr val="FF0000"/>
+                </a:solidFill>
+              </a:rPr>
+              <a:t> 문항에 대한 처리 검토 필요</a:t>
+            </a:r>
+            <a:endParaRPr lang="en-US" altLang="ko-KR" dirty="0">
+              <a:solidFill>
+                <a:srgbClr val="FF0000"/>
+              </a:solidFill>
+            </a:endParaRPr>
+          </a:p>
+        </p:txBody>
+      </p:sp>
+    </p:spTree>
+    <p:extLst>
+      <p:ext uri="{BB962C8B-B14F-4D97-AF65-F5344CB8AC3E}">
+        <p14:creationId xmlns:p14="http://schemas.microsoft.com/office/powerpoint/2010/main" val="2814201085"/>
       </p:ext>
     </p:extLst>
   </p:cSld>
